--- a/Slides/Phase3B_18Slide_Deck.pptx
+++ b/Slides/Phase3B_18Slide_Deck.pptx
@@ -23,6 +23,11 @@
     <p:sldId id="271" r:id="rId22"/>
     <p:sldId id="272" r:id="rId23"/>
     <p:sldId id="273" r:id="rId24"/>
+    <p:sldId id="274" r:id="rId25"/>
+    <p:sldId id="275" r:id="rId26"/>
+    <p:sldId id="276" r:id="rId27"/>
+    <p:sldId id="277" r:id="rId28"/>
+    <p:sldId id="278" r:id="rId29"/>
   </p:sldIdLst>
   <p:sldSz cx="12188952" cy="6858000" type="screen4x3"/>
   <p:notesSz cx="6858000" cy="9144000"/>
@@ -3120,6 +3125,9 @@
           <a:bodyPr/>
           <a:lstStyle/>
           <a:p>
+            <a:pPr>
+              <a:defRPr sz="3000"/>
+            </a:pPr>
             <a:r>
               <a:t>Phase 3B: Multi-Task Neural PK-PD with Neural ODE</a:t>
             </a:r>
@@ -3180,8 +3188,11 @@
           <a:bodyPr/>
           <a:lstStyle/>
           <a:p>
-            <a:r>
-              <a:t>Slide 10 - Task Heads</a:t>
+            <a:pPr>
+              <a:defRPr sz="3000"/>
+            </a:pPr>
+            <a:r>
+              <a:t>Model Hyperparameters</a:t>
             </a:r>
           </a:p>
         </p:txBody>
@@ -3202,34 +3213,42 @@
           <a:lstStyle/>
           <a:p>
             <a:pPr>
-              <a:defRPr sz="2000"/>
-            </a:pPr>
-            <a:r>
-              <a:t>DeepRegressionHead for binding.</a:t>
-            </a:r>
-          </a:p>
-          <a:p>
-            <a:pPr>
-              <a:defRPr sz="2000"/>
-            </a:pPr>
-            <a:r>
-              <a:t>RegressionHead for clearance.</a:t>
-            </a:r>
-          </a:p>
-          <a:p>
-            <a:pPr>
-              <a:defRPr sz="2000"/>
-            </a:pPr>
-            <a:r>
-              <a:t>ClassificationHead for hERG and Caco-2 with logits output.</a:t>
-            </a:r>
-          </a:p>
-          <a:p>
-            <a:pPr>
-              <a:defRPr sz="2000"/>
-            </a:pPr>
-            <a:r>
-              <a:t>Design balances shared learning with endpoint-specific capacity.</a:t>
+              <a:defRPr sz="1800"/>
+            </a:pPr>
+            <a:r>
+              <a:t>Architecture: input_dim, hidden_dim, latent_dim, dropout.</a:t>
+            </a:r>
+          </a:p>
+          <a:p>
+            <a:pPr>
+              <a:defRPr sz="1800"/>
+            </a:pPr>
+            <a:r>
+              <a:t>Head capacity: reg_head_hidden and reg_head_dropout for binding.</a:t>
+            </a:r>
+          </a:p>
+          <a:p>
+            <a:pPr>
+              <a:defRPr sz="1800"/>
+            </a:pPr>
+            <a:r>
+              <a:t>Optimization: learning_rate, weight_decay, batch_size, epochs, patience, grad_clip.</a:t>
+            </a:r>
+          </a:p>
+          <a:p>
+            <a:pPr>
+              <a:defRPr sz="1800"/>
+            </a:pPr>
+            <a:r>
+              <a:t>Loss: task weights, focal_gamma, and class positive weights.</a:t>
+            </a:r>
+          </a:p>
+          <a:p>
+            <a:pPr>
+              <a:defRPr sz="1800"/>
+            </a:pPr>
+            <a:r>
+              <a:t>Data split: test_size, val_size, and fixed random seed.</a:t>
             </a:r>
           </a:p>
         </p:txBody>
@@ -3267,8 +3286,11 @@
           <a:bodyPr/>
           <a:lstStyle/>
           <a:p>
-            <a:r>
-              <a:t>Slide 11 - PKODEFunc Internals</a:t>
+            <a:pPr>
+              <a:defRPr sz="3000"/>
+            </a:pPr>
+            <a:r>
+              <a:t>Why This Architecture Was Chosen</a:t>
             </a:r>
           </a:p>
         </p:txBody>
@@ -3289,34 +3311,42 @@
           <a:lstStyle/>
           <a:p>
             <a:pPr>
-              <a:defRPr sz="2000"/>
-            </a:pPr>
-            <a:r>
-              <a:t>Latent state maps to PK parameters [CL, V].</a:t>
-            </a:r>
-          </a:p>
-          <a:p>
-            <a:pPr>
-              <a:defRPr sz="2000"/>
-            </a:pPr>
-            <a:r>
-              <a:t>Positivity enforced by exponentiation.</a:t>
-            </a:r>
-          </a:p>
-          <a:p>
-            <a:pPr>
-              <a:defRPr sz="2000"/>
-            </a:pPr>
-            <a:r>
-              <a:t>k = CL / V and dynamics dC/dt = -kC.</a:t>
-            </a:r>
-          </a:p>
-          <a:p>
-            <a:pPr>
-              <a:defRPr sz="2000"/>
-            </a:pPr>
-            <a:r>
-              <a:t>ODE integration returns concentration-time trajectories.</a:t>
+              <a:defRPr sz="1800"/>
+            </a:pPr>
+            <a:r>
+              <a:t>Shared encoder + task heads balances transfer and endpoint specialization.</a:t>
+            </a:r>
+          </a:p>
+          <a:p>
+            <a:pPr>
+              <a:defRPr sz="1800"/>
+            </a:pPr>
+            <a:r>
+              <a:t>LayerNorm was selected for stable interleaved multi-task training.</a:t>
+            </a:r>
+          </a:p>
+          <a:p>
+            <a:pPr>
+              <a:defRPr sz="1800"/>
+            </a:pPr>
+            <a:r>
+              <a:t>A deeper binding head addresses harder regression complexity.</a:t>
+            </a:r>
+          </a:p>
+          <a:p>
+            <a:pPr>
+              <a:defRPr sz="1800"/>
+            </a:pPr>
+            <a:r>
+              <a:t>Logits-based heads support stable optimization and calibration.</a:t>
+            </a:r>
+          </a:p>
+          <a:p>
+            <a:pPr>
+              <a:defRPr sz="1800"/>
+            </a:pPr>
+            <a:r>
+              <a:t>Neural ODE adds mechanistic PK trajectories, not only scalar predictions.</a:t>
             </a:r>
           </a:p>
         </p:txBody>
@@ -3354,8 +3384,11 @@
           <a:bodyPr/>
           <a:lstStyle/>
           <a:p>
-            <a:r>
-              <a:t>Slide 12 - Training Protocol</a:t>
+            <a:pPr>
+              <a:defRPr sz="3000"/>
+            </a:pPr>
+            <a:r>
+              <a:t>Task Heads</a:t>
             </a:r>
           </a:p>
         </p:txBody>
@@ -3376,34 +3409,34 @@
           <a:lstStyle/>
           <a:p>
             <a:pPr>
-              <a:defRPr sz="2000"/>
-            </a:pPr>
-            <a:r>
-              <a:t>Task-wise train/val/test splits.</a:t>
-            </a:r>
-          </a:p>
-          <a:p>
-            <a:pPr>
-              <a:defRPr sz="2000"/>
-            </a:pPr>
-            <a:r>
-              <a:t>Interleaved updates across tasks each epoch.</a:t>
-            </a:r>
-          </a:p>
-          <a:p>
-            <a:pPr>
-              <a:defRPr sz="2000"/>
-            </a:pPr>
-            <a:r>
-              <a:t>Minimum-batch scheduling prevents over-cycling small tasks.</a:t>
-            </a:r>
-          </a:p>
-          <a:p>
-            <a:pPr>
-              <a:defRPr sz="2000"/>
-            </a:pPr>
-            <a:r>
-              <a:t>Gradient clipping applied per update.</a:t>
+              <a:defRPr sz="1800"/>
+            </a:pPr>
+            <a:r>
+              <a:t>DeepRegressionHead is used for the harder binding regression task.</a:t>
+            </a:r>
+          </a:p>
+          <a:p>
+            <a:pPr>
+              <a:defRPr sz="1800"/>
+            </a:pPr>
+            <a:r>
+              <a:t>RegressionHead is used for clearance prediction.</a:t>
+            </a:r>
+          </a:p>
+          <a:p>
+            <a:pPr>
+              <a:defRPr sz="1800"/>
+            </a:pPr>
+            <a:r>
+              <a:t>ClassificationHead produces logits for hERG and Caco-2.</a:t>
+            </a:r>
+          </a:p>
+          <a:p>
+            <a:pPr>
+              <a:defRPr sz="1800"/>
+            </a:pPr>
+            <a:r>
+              <a:t>Head-level asymmetry matches endpoint complexity and data profile.</a:t>
             </a:r>
           </a:p>
         </p:txBody>
@@ -3441,8 +3474,11 @@
           <a:bodyPr/>
           <a:lstStyle/>
           <a:p>
-            <a:r>
-              <a:t>Slide 13 - Loss Design</a:t>
+            <a:pPr>
+              <a:defRPr sz="3000"/>
+            </a:pPr>
+            <a:r>
+              <a:t>PKODEFunc Internals</a:t>
             </a:r>
           </a:p>
         </p:txBody>
@@ -3463,34 +3499,34 @@
           <a:lstStyle/>
           <a:p>
             <a:pPr>
-              <a:defRPr sz="2000"/>
-            </a:pPr>
-            <a:r>
-              <a:t>Weighted multi-task objective.</a:t>
-            </a:r>
-          </a:p>
-          <a:p>
-            <a:pPr>
-              <a:defRPr sz="2000"/>
-            </a:pPr>
-            <a:r>
-              <a:t>MSE for regression tasks.</a:t>
-            </a:r>
-          </a:p>
-          <a:p>
-            <a:pPr>
-              <a:defRPr sz="2000"/>
-            </a:pPr>
-            <a:r>
-              <a:t>Weighted BCE-with-logits or focal logits for classification.</a:t>
-            </a:r>
-          </a:p>
-          <a:p>
-            <a:pPr>
-              <a:defRPr sz="2000"/>
-            </a:pPr>
-            <a:r>
-              <a:t>Positive-class weighting addresses class imbalance.</a:t>
+              <a:defRPr sz="1800"/>
+            </a:pPr>
+            <a:r>
+              <a:t>Latent representation predicts PK parameters CL and V.</a:t>
+            </a:r>
+          </a:p>
+          <a:p>
+            <a:pPr>
+              <a:defRPr sz="1800"/>
+            </a:pPr>
+            <a:r>
+              <a:t>Exponentiation enforces positive-valued pharmacokinetic parameters.</a:t>
+            </a:r>
+          </a:p>
+          <a:p>
+            <a:pPr>
+              <a:defRPr sz="1800"/>
+            </a:pPr>
+            <a:r>
+              <a:t>Elimination rate is defined as k = CL / V.</a:t>
+            </a:r>
+          </a:p>
+          <a:p>
+            <a:pPr>
+              <a:defRPr sz="1800"/>
+            </a:pPr>
+            <a:r>
+              <a:t>Dynamics follow dC/dt = -kC and are integrated over time.</a:t>
             </a:r>
           </a:p>
         </p:txBody>
@@ -3528,8 +3564,11 @@
           <a:bodyPr/>
           <a:lstStyle/>
           <a:p>
-            <a:r>
-              <a:t>Slide 14 - Optimization and Early Stopping</a:t>
+            <a:pPr>
+              <a:defRPr sz="3000"/>
+            </a:pPr>
+            <a:r>
+              <a:t>Training Protocol</a:t>
             </a:r>
           </a:p>
         </p:txBody>
@@ -3550,34 +3589,34 @@
           <a:lstStyle/>
           <a:p>
             <a:pPr>
-              <a:defRPr sz="2000"/>
-            </a:pPr>
-            <a:r>
-              <a:t>Optimizer: Adam with weight decay.</a:t>
-            </a:r>
-          </a:p>
-          <a:p>
-            <a:pPr>
-              <a:defRPr sz="2000"/>
-            </a:pPr>
-            <a:r>
-              <a:t>Scheduler: ReduceLROnPlateau on validation objective.</a:t>
-            </a:r>
-          </a:p>
-          <a:p>
-            <a:pPr>
-              <a:defRPr sz="2000"/>
-            </a:pPr>
-            <a:r>
-              <a:t>Early stopping by patience on aggregated validation loss.</a:t>
-            </a:r>
-          </a:p>
-          <a:p>
-            <a:pPr>
-              <a:defRPr sz="2000"/>
-            </a:pPr>
-            <a:r>
-              <a:t>Best checkpoint persisted for handoff and reproducibility.</a:t>
+              <a:defRPr sz="1800"/>
+            </a:pPr>
+            <a:r>
+              <a:t>Train/validation/test splits are prepared task-wise.</a:t>
+            </a:r>
+          </a:p>
+          <a:p>
+            <a:pPr>
+              <a:defRPr sz="1800"/>
+            </a:pPr>
+            <a:r>
+              <a:t>Training interleaves task updates inside each epoch.</a:t>
+            </a:r>
+          </a:p>
+          <a:p>
+            <a:pPr>
+              <a:defRPr sz="1800"/>
+            </a:pPr>
+            <a:r>
+              <a:t>Minimum-batch scheduling avoids repeated oversampling of small tasks.</a:t>
+            </a:r>
+          </a:p>
+          <a:p>
+            <a:pPr>
+              <a:defRPr sz="1800"/>
+            </a:pPr>
+            <a:r>
+              <a:t>Gradient clipping is applied each optimization step for stability.</a:t>
             </a:r>
           </a:p>
         </p:txBody>
@@ -3615,8 +3654,11 @@
           <a:bodyPr/>
           <a:lstStyle/>
           <a:p>
-            <a:r>
-              <a:t>Slide 15 - Evaluation Protocol</a:t>
+            <a:pPr>
+              <a:defRPr sz="3000"/>
+            </a:pPr>
+            <a:r>
+              <a:t>Loss Design</a:t>
             </a:r>
           </a:p>
         </p:txBody>
@@ -3637,34 +3679,34 @@
           <a:lstStyle/>
           <a:p>
             <a:pPr>
-              <a:defRPr sz="2000"/>
-            </a:pPr>
-            <a:r>
-              <a:t>Regression metrics: RMSE, MAE, R2.</a:t>
-            </a:r>
-          </a:p>
-          <a:p>
-            <a:pPr>
-              <a:defRPr sz="2000"/>
-            </a:pPr>
-            <a:r>
-              <a:t>Classification metrics: AUROC, accuracy, F1.</a:t>
-            </a:r>
-          </a:p>
-          <a:p>
-            <a:pPr>
-              <a:defRPr sz="2000"/>
-            </a:pPr>
-            <a:r>
-              <a:t>Validation threshold selected via Youden criterion.</a:t>
-            </a:r>
-          </a:p>
-          <a:p>
-            <a:pPr>
-              <a:defRPr sz="2000"/>
-            </a:pPr>
-            <a:r>
-              <a:t>Task targets tracked consistently for go/no-go decisions.</a:t>
+              <a:defRPr sz="1800"/>
+            </a:pPr>
+            <a:r>
+              <a:t>Objective is a weighted sum across all tasks.</a:t>
+            </a:r>
+          </a:p>
+          <a:p>
+            <a:pPr>
+              <a:defRPr sz="1800"/>
+            </a:pPr>
+            <a:r>
+              <a:t>MSE is used for binding and clearance regression.</a:t>
+            </a:r>
+          </a:p>
+          <a:p>
+            <a:pPr>
+              <a:defRPr sz="1800"/>
+            </a:pPr>
+            <a:r>
+              <a:t>Weighted BCE-with-logits or focal logits is used for classification.</a:t>
+            </a:r>
+          </a:p>
+          <a:p>
+            <a:pPr>
+              <a:defRPr sz="1800"/>
+            </a:pPr>
+            <a:r>
+              <a:t>Positive-class weighting mitigates imbalance effects.</a:t>
             </a:r>
           </a:p>
         </p:txBody>
@@ -3689,6 +3731,186 @@
       <p:grpSpPr/>
       <p:sp>
         <p:nvSpPr>
+          <p:cNvPr id="2" name="Title 1"/>
+          <p:cNvSpPr>
+            <a:spLocks noGrp="1"/>
+          </p:cNvSpPr>
+          <p:nvPr>
+            <p:ph type="title"/>
+          </p:nvPr>
+        </p:nvSpPr>
+        <p:spPr/>
+        <p:txBody>
+          <a:bodyPr/>
+          <a:lstStyle/>
+          <a:p>
+            <a:pPr>
+              <a:defRPr sz="3000"/>
+            </a:pPr>
+            <a:r>
+              <a:t>Optimization and Early Stopping</a:t>
+            </a:r>
+          </a:p>
+        </p:txBody>
+      </p:sp>
+      <p:sp>
+        <p:nvSpPr>
+          <p:cNvPr id="3" name="Content Placeholder 2"/>
+          <p:cNvSpPr>
+            <a:spLocks noGrp="1"/>
+          </p:cNvSpPr>
+          <p:nvPr>
+            <p:ph idx="1"/>
+          </p:nvPr>
+        </p:nvSpPr>
+        <p:spPr/>
+        <p:txBody>
+          <a:bodyPr/>
+          <a:lstStyle/>
+          <a:p>
+            <a:pPr>
+              <a:defRPr sz="1800"/>
+            </a:pPr>
+            <a:r>
+              <a:t>Adam optimizer is used with weight decay regularization.</a:t>
+            </a:r>
+          </a:p>
+          <a:p>
+            <a:pPr>
+              <a:defRPr sz="1800"/>
+            </a:pPr>
+            <a:r>
+              <a:t>ReduceLROnPlateau adapts learning rate from validation behavior.</a:t>
+            </a:r>
+          </a:p>
+          <a:p>
+            <a:pPr>
+              <a:defRPr sz="1800"/>
+            </a:pPr>
+            <a:r>
+              <a:t>Early stopping monitors aggregated validation loss with patience.</a:t>
+            </a:r>
+          </a:p>
+          <a:p>
+            <a:pPr>
+              <a:defRPr sz="1800"/>
+            </a:pPr>
+            <a:r>
+              <a:t>Best checkpoint is persisted for reproducible handoff.</a:t>
+            </a:r>
+          </a:p>
+        </p:txBody>
+      </p:sp>
+    </p:spTree>
+  </p:cSld>
+  <p:clrMapOvr>
+    <a:masterClrMapping/>
+  </p:clrMapOvr>
+</p:sld>
+</file>
+
+<file path=ppt/slides/slide17.xml><?xml version="1.0" encoding="utf-8"?>
+<p:sld xmlns:a="http://schemas.openxmlformats.org/drawingml/2006/main" xmlns:p="http://schemas.openxmlformats.org/presentationml/2006/main" xmlns:r="http://schemas.openxmlformats.org/officeDocument/2006/relationships">
+  <p:cSld>
+    <p:spTree>
+      <p:nvGrpSpPr>
+        <p:cNvPr id="1" name=""/>
+        <p:cNvGrpSpPr/>
+        <p:nvPr/>
+      </p:nvGrpSpPr>
+      <p:grpSpPr/>
+      <p:sp>
+        <p:nvSpPr>
+          <p:cNvPr id="2" name="Title 1"/>
+          <p:cNvSpPr>
+            <a:spLocks noGrp="1"/>
+          </p:cNvSpPr>
+          <p:nvPr>
+            <p:ph type="title"/>
+          </p:nvPr>
+        </p:nvSpPr>
+        <p:spPr/>
+        <p:txBody>
+          <a:bodyPr/>
+          <a:lstStyle/>
+          <a:p>
+            <a:pPr>
+              <a:defRPr sz="3000"/>
+            </a:pPr>
+            <a:r>
+              <a:t>Evaluation Protocol</a:t>
+            </a:r>
+          </a:p>
+        </p:txBody>
+      </p:sp>
+      <p:sp>
+        <p:nvSpPr>
+          <p:cNvPr id="3" name="Content Placeholder 2"/>
+          <p:cNvSpPr>
+            <a:spLocks noGrp="1"/>
+          </p:cNvSpPr>
+          <p:nvPr>
+            <p:ph idx="1"/>
+          </p:nvPr>
+        </p:nvSpPr>
+        <p:spPr/>
+        <p:txBody>
+          <a:bodyPr/>
+          <a:lstStyle/>
+          <a:p>
+            <a:pPr>
+              <a:defRPr sz="1800"/>
+            </a:pPr>
+            <a:r>
+              <a:t>Regression quality is tracked with RMSE, MAE, and R2.</a:t>
+            </a:r>
+          </a:p>
+          <a:p>
+            <a:pPr>
+              <a:defRPr sz="1800"/>
+            </a:pPr>
+            <a:r>
+              <a:t>Classification quality is tracked with AUROC, accuracy, and F1.</a:t>
+            </a:r>
+          </a:p>
+          <a:p>
+            <a:pPr>
+              <a:defRPr sz="1800"/>
+            </a:pPr>
+            <a:r>
+              <a:t>Decision thresholds are selected on validation using Youden criterion.</a:t>
+            </a:r>
+          </a:p>
+          <a:p>
+            <a:pPr>
+              <a:defRPr sz="1800"/>
+            </a:pPr>
+            <a:r>
+              <a:t>Task-level targets support consistent go/no-go monitoring.</a:t>
+            </a:r>
+          </a:p>
+        </p:txBody>
+      </p:sp>
+    </p:spTree>
+  </p:cSld>
+  <p:clrMapOvr>
+    <a:masterClrMapping/>
+  </p:clrMapOvr>
+</p:sld>
+</file>
+
+<file path=ppt/slides/slide18.xml><?xml version="1.0" encoding="utf-8"?>
+<p:sld xmlns:a="http://schemas.openxmlformats.org/drawingml/2006/main" xmlns:p="http://schemas.openxmlformats.org/presentationml/2006/main" xmlns:r="http://schemas.openxmlformats.org/officeDocument/2006/relationships">
+  <p:cSld>
+    <p:spTree>
+      <p:nvGrpSpPr>
+        <p:cNvPr id="1" name=""/>
+        <p:cNvGrpSpPr/>
+        <p:nvPr/>
+      </p:nvGrpSpPr>
+      <p:grpSpPr/>
+      <p:sp>
+        <p:nvSpPr>
           <p:cNvPr id="2" name="TextBox 1"/>
           <p:cNvSpPr txBox="1"/>
           <p:nvPr/>
@@ -3713,7 +3935,1944 @@
               <a:defRPr sz="3000" b="1"/>
             </a:pPr>
             <a:r>
-              <a:t>Slide 16 - Visual: Training Dynamics</a:t>
+              <a:t>Architecture Blocks Table</a:t>
+            </a:r>
+          </a:p>
+        </p:txBody>
+      </p:sp>
+      <p:graphicFrame>
+        <p:nvGraphicFramePr>
+          <p:cNvPr id="3" name="Table 2"/>
+          <p:cNvGraphicFramePr>
+            <a:graphicFrameLocks noGrp="1"/>
+          </p:cNvGraphicFramePr>
+          <p:nvPr/>
+        </p:nvGraphicFramePr>
+        <p:xfrm>
+          <a:off x="548640" y="914400"/>
+          <a:ext cx="11064240" cy="5394960"/>
+        </p:xfrm>
+        <a:graphic>
+          <a:graphicData uri="http://schemas.openxmlformats.org/drawingml/2006/table">
+            <a:tbl>
+              <a:tblPr firstRow="1" bandRow="1">
+                <a:tableStyleId>{5C22544A-7EE6-4342-B048-85BDC9FD1C3A}</a:tableStyleId>
+              </a:tblPr>
+              <a:tblGrid>
+                <a:gridCol w="2212848"/>
+                <a:gridCol w="2212848"/>
+                <a:gridCol w="2212848"/>
+                <a:gridCol w="2212848"/>
+                <a:gridCol w="2212848"/>
+              </a:tblGrid>
+              <a:tr h="899160">
+                <a:tc>
+                  <a:txBody>
+                    <a:bodyPr/>
+                    <a:lstStyle/>
+                    <a:p>
+                      <a:pPr>
+                        <a:defRPr b="1" sz="1300"/>
+                      </a:pPr>
+                      <a:r>
+                        <a:t>Module</a:t>
+                      </a:r>
+                    </a:p>
+                  </a:txBody>
+                  <a:tcPr/>
+                </a:tc>
+                <a:tc>
+                  <a:txBody>
+                    <a:bodyPr/>
+                    <a:lstStyle/>
+                    <a:p>
+                      <a:pPr>
+                        <a:defRPr b="1" sz="1300"/>
+                      </a:pPr>
+                      <a:r>
+                        <a:t>Inputs</a:t>
+                      </a:r>
+                    </a:p>
+                  </a:txBody>
+                  <a:tcPr/>
+                </a:tc>
+                <a:tc>
+                  <a:txBody>
+                    <a:bodyPr/>
+                    <a:lstStyle/>
+                    <a:p>
+                      <a:pPr>
+                        <a:defRPr b="1" sz="1300"/>
+                      </a:pPr>
+                      <a:r>
+                        <a:t>Computation</a:t>
+                      </a:r>
+                    </a:p>
+                  </a:txBody>
+                  <a:tcPr/>
+                </a:tc>
+                <a:tc>
+                  <a:txBody>
+                    <a:bodyPr/>
+                    <a:lstStyle/>
+                    <a:p>
+                      <a:pPr>
+                        <a:defRPr b="1" sz="1300"/>
+                      </a:pPr>
+                      <a:r>
+                        <a:t>Output</a:t>
+                      </a:r>
+                    </a:p>
+                  </a:txBody>
+                  <a:tcPr/>
+                </a:tc>
+                <a:tc>
+                  <a:txBody>
+                    <a:bodyPr/>
+                    <a:lstStyle/>
+                    <a:p>
+                      <a:pPr>
+                        <a:defRPr b="1" sz="1300"/>
+                      </a:pPr>
+                      <a:r>
+                        <a:t>Purpose</a:t>
+                      </a:r>
+                    </a:p>
+                  </a:txBody>
+                  <a:tcPr/>
+                </a:tc>
+              </a:tr>
+              <a:tr h="899160">
+                <a:tc>
+                  <a:txBody>
+                    <a:bodyPr/>
+                    <a:lstStyle/>
+                    <a:p>
+                      <a:pPr>
+                        <a:defRPr sz="1100"/>
+                      </a:pPr>
+                      <a:r>
+                        <a:t>SharedEncoder</a:t>
+                      </a:r>
+                    </a:p>
+                  </a:txBody>
+                  <a:tcPr/>
+                </a:tc>
+                <a:tc>
+                  <a:txBody>
+                    <a:bodyPr/>
+                    <a:lstStyle/>
+                    <a:p>
+                      <a:pPr>
+                        <a:defRPr sz="1100"/>
+                      </a:pPr>
+                      <a:r>
+                        <a:t>features</a:t>
+                      </a:r>
+                    </a:p>
+                  </a:txBody>
+                  <a:tcPr/>
+                </a:tc>
+                <a:tc>
+                  <a:txBody>
+                    <a:bodyPr/>
+                    <a:lstStyle/>
+                    <a:p>
+                      <a:pPr>
+                        <a:defRPr sz="1100"/>
+                      </a:pPr>
+                      <a:r>
+                        <a:t>2x Linear+LayerNorm+ReLU+Dropout</a:t>
+                      </a:r>
+                    </a:p>
+                  </a:txBody>
+                  <a:tcPr/>
+                </a:tc>
+                <a:tc>
+                  <a:txBody>
+                    <a:bodyPr/>
+                    <a:lstStyle/>
+                    <a:p>
+                      <a:pPr>
+                        <a:defRPr sz="1100"/>
+                      </a:pPr>
+                      <a:r>
+                        <a:t>latent</a:t>
+                      </a:r>
+                    </a:p>
+                  </a:txBody>
+                  <a:tcPr/>
+                </a:tc>
+                <a:tc>
+                  <a:txBody>
+                    <a:bodyPr/>
+                    <a:lstStyle/>
+                    <a:p>
+                      <a:pPr>
+                        <a:defRPr sz="1100"/>
+                      </a:pPr>
+                      <a:r>
+                        <a:t>Shared molecular representation</a:t>
+                      </a:r>
+                    </a:p>
+                  </a:txBody>
+                  <a:tcPr/>
+                </a:tc>
+              </a:tr>
+              <a:tr h="899160">
+                <a:tc>
+                  <a:txBody>
+                    <a:bodyPr/>
+                    <a:lstStyle/>
+                    <a:p>
+                      <a:pPr>
+                        <a:defRPr sz="1100"/>
+                      </a:pPr>
+                      <a:r>
+                        <a:t>DeepRegressionHead</a:t>
+                      </a:r>
+                    </a:p>
+                  </a:txBody>
+                  <a:tcPr/>
+                </a:tc>
+                <a:tc>
+                  <a:txBody>
+                    <a:bodyPr/>
+                    <a:lstStyle/>
+                    <a:p>
+                      <a:pPr>
+                        <a:defRPr sz="1100"/>
+                      </a:pPr>
+                      <a:r>
+                        <a:t>latent</a:t>
+                      </a:r>
+                    </a:p>
+                  </a:txBody>
+                  <a:tcPr/>
+                </a:tc>
+                <a:tc>
+                  <a:txBody>
+                    <a:bodyPr/>
+                    <a:lstStyle/>
+                    <a:p>
+                      <a:pPr>
+                        <a:defRPr sz="1100"/>
+                      </a:pPr>
+                      <a:r>
+                        <a:t>2 hidden layers + dropout</a:t>
+                      </a:r>
+                    </a:p>
+                  </a:txBody>
+                  <a:tcPr/>
+                </a:tc>
+                <a:tc>
+                  <a:txBody>
+                    <a:bodyPr/>
+                    <a:lstStyle/>
+                    <a:p>
+                      <a:pPr>
+                        <a:defRPr sz="1100"/>
+                      </a:pPr>
+                      <a:r>
+                        <a:t>binding score</a:t>
+                      </a:r>
+                    </a:p>
+                  </a:txBody>
+                  <a:tcPr/>
+                </a:tc>
+                <a:tc>
+                  <a:txBody>
+                    <a:bodyPr/>
+                    <a:lstStyle/>
+                    <a:p>
+                      <a:pPr>
+                        <a:defRPr sz="1100"/>
+                      </a:pPr>
+                      <a:r>
+                        <a:t>Harder regression task</a:t>
+                      </a:r>
+                    </a:p>
+                  </a:txBody>
+                  <a:tcPr/>
+                </a:tc>
+              </a:tr>
+              <a:tr h="899160">
+                <a:tc>
+                  <a:txBody>
+                    <a:bodyPr/>
+                    <a:lstStyle/>
+                    <a:p>
+                      <a:pPr>
+                        <a:defRPr sz="1100"/>
+                      </a:pPr>
+                      <a:r>
+                        <a:t>RegressionHead</a:t>
+                      </a:r>
+                    </a:p>
+                  </a:txBody>
+                  <a:tcPr/>
+                </a:tc>
+                <a:tc>
+                  <a:txBody>
+                    <a:bodyPr/>
+                    <a:lstStyle/>
+                    <a:p>
+                      <a:pPr>
+                        <a:defRPr sz="1100"/>
+                      </a:pPr>
+                      <a:r>
+                        <a:t>latent</a:t>
+                      </a:r>
+                    </a:p>
+                  </a:txBody>
+                  <a:tcPr/>
+                </a:tc>
+                <a:tc>
+                  <a:txBody>
+                    <a:bodyPr/>
+                    <a:lstStyle/>
+                    <a:p>
+                      <a:pPr>
+                        <a:defRPr sz="1100"/>
+                      </a:pPr>
+                      <a:r>
+                        <a:t>Compact MLP</a:t>
+                      </a:r>
+                    </a:p>
+                  </a:txBody>
+                  <a:tcPr/>
+                </a:tc>
+                <a:tc>
+                  <a:txBody>
+                    <a:bodyPr/>
+                    <a:lstStyle/>
+                    <a:p>
+                      <a:pPr>
+                        <a:defRPr sz="1100"/>
+                      </a:pPr>
+                      <a:r>
+                        <a:t>clearance score</a:t>
+                      </a:r>
+                    </a:p>
+                  </a:txBody>
+                  <a:tcPr/>
+                </a:tc>
+                <a:tc>
+                  <a:txBody>
+                    <a:bodyPr/>
+                    <a:lstStyle/>
+                    <a:p>
+                      <a:pPr>
+                        <a:defRPr sz="1100"/>
+                      </a:pPr>
+                      <a:r>
+                        <a:t>Stable regression mapping</a:t>
+                      </a:r>
+                    </a:p>
+                  </a:txBody>
+                  <a:tcPr/>
+                </a:tc>
+              </a:tr>
+              <a:tr h="899160">
+                <a:tc>
+                  <a:txBody>
+                    <a:bodyPr/>
+                    <a:lstStyle/>
+                    <a:p>
+                      <a:pPr>
+                        <a:defRPr sz="1100"/>
+                      </a:pPr>
+                      <a:r>
+                        <a:t>ClassificationHead</a:t>
+                      </a:r>
+                    </a:p>
+                  </a:txBody>
+                  <a:tcPr/>
+                </a:tc>
+                <a:tc>
+                  <a:txBody>
+                    <a:bodyPr/>
+                    <a:lstStyle/>
+                    <a:p>
+                      <a:pPr>
+                        <a:defRPr sz="1100"/>
+                      </a:pPr>
+                      <a:r>
+                        <a:t>latent</a:t>
+                      </a:r>
+                    </a:p>
+                  </a:txBody>
+                  <a:tcPr/>
+                </a:tc>
+                <a:tc>
+                  <a:txBody>
+                    <a:bodyPr/>
+                    <a:lstStyle/>
+                    <a:p>
+                      <a:pPr>
+                        <a:defRPr sz="1100"/>
+                      </a:pPr>
+                      <a:r>
+                        <a:t>MLP logits</a:t>
+                      </a:r>
+                    </a:p>
+                  </a:txBody>
+                  <a:tcPr/>
+                </a:tc>
+                <a:tc>
+                  <a:txBody>
+                    <a:bodyPr/>
+                    <a:lstStyle/>
+                    <a:p>
+                      <a:pPr>
+                        <a:defRPr sz="1100"/>
+                      </a:pPr>
+                      <a:r>
+                        <a:t>hERG/Caco-2 logits</a:t>
+                      </a:r>
+                    </a:p>
+                  </a:txBody>
+                  <a:tcPr/>
+                </a:tc>
+                <a:tc>
+                  <a:txBody>
+                    <a:bodyPr/>
+                    <a:lstStyle/>
+                    <a:p>
+                      <a:pPr>
+                        <a:defRPr sz="1100"/>
+                      </a:pPr>
+                      <a:r>
+                        <a:t>Binary endpoints</a:t>
+                      </a:r>
+                    </a:p>
+                  </a:txBody>
+                  <a:tcPr/>
+                </a:tc>
+              </a:tr>
+              <a:tr h="899160">
+                <a:tc>
+                  <a:txBody>
+                    <a:bodyPr/>
+                    <a:lstStyle/>
+                    <a:p>
+                      <a:pPr>
+                        <a:defRPr sz="1100"/>
+                      </a:pPr>
+                      <a:r>
+                        <a:t>PKODEFunc</a:t>
+                      </a:r>
+                    </a:p>
+                  </a:txBody>
+                  <a:tcPr/>
+                </a:tc>
+                <a:tc>
+                  <a:txBody>
+                    <a:bodyPr/>
+                    <a:lstStyle/>
+                    <a:p>
+                      <a:pPr>
+                        <a:defRPr sz="1100"/>
+                      </a:pPr>
+                      <a:r>
+                        <a:t>latent + C(t)</a:t>
+                      </a:r>
+                    </a:p>
+                  </a:txBody>
+                  <a:tcPr/>
+                </a:tc>
+                <a:tc>
+                  <a:txBody>
+                    <a:bodyPr/>
+                    <a:lstStyle/>
+                    <a:p>
+                      <a:pPr>
+                        <a:defRPr sz="1100"/>
+                      </a:pPr>
+                      <a:r>
+                        <a:t>predict CL,V -&gt; k; dC/dt=-kC</a:t>
+                      </a:r>
+                    </a:p>
+                  </a:txBody>
+                  <a:tcPr/>
+                </a:tc>
+                <a:tc>
+                  <a:txBody>
+                    <a:bodyPr/>
+                    <a:lstStyle/>
+                    <a:p>
+                      <a:pPr>
+                        <a:defRPr sz="1100"/>
+                      </a:pPr>
+                      <a:r>
+                        <a:t>PK curve</a:t>
+                      </a:r>
+                    </a:p>
+                  </a:txBody>
+                  <a:tcPr/>
+                </a:tc>
+                <a:tc>
+                  <a:txBody>
+                    <a:bodyPr/>
+                    <a:lstStyle/>
+                    <a:p>
+                      <a:pPr>
+                        <a:defRPr sz="1100"/>
+                      </a:pPr>
+                      <a:r>
+                        <a:t>Mechanistic PK dynamics</a:t>
+                      </a:r>
+                    </a:p>
+                  </a:txBody>
+                  <a:tcPr/>
+                </a:tc>
+              </a:tr>
+            </a:tbl>
+          </a:graphicData>
+        </a:graphic>
+      </p:graphicFrame>
+    </p:spTree>
+  </p:cSld>
+  <p:clrMapOvr>
+    <a:masterClrMapping/>
+  </p:clrMapOvr>
+</p:sld>
+</file>
+
+<file path=ppt/slides/slide19.xml><?xml version="1.0" encoding="utf-8"?>
+<p:sld xmlns:a="http://schemas.openxmlformats.org/drawingml/2006/main" xmlns:p="http://schemas.openxmlformats.org/presentationml/2006/main" xmlns:r="http://schemas.openxmlformats.org/officeDocument/2006/relationships">
+  <p:cSld>
+    <p:spTree>
+      <p:nvGrpSpPr>
+        <p:cNvPr id="1" name=""/>
+        <p:cNvGrpSpPr/>
+        <p:nvPr/>
+      </p:nvGrpSpPr>
+      <p:grpSpPr/>
+      <p:sp>
+        <p:nvSpPr>
+          <p:cNvPr id="2" name="TextBox 1"/>
+          <p:cNvSpPr txBox="1"/>
+          <p:nvPr/>
+        </p:nvSpPr>
+        <p:spPr>
+          <a:xfrm>
+            <a:off x="548640" y="182880"/>
+            <a:ext cx="10972800" cy="640080"/>
+          </a:xfrm>
+          <a:prstGeom prst="rect">
+            <a:avLst/>
+          </a:prstGeom>
+          <a:noFill/>
+        </p:spPr>
+        <p:txBody>
+          <a:bodyPr wrap="none">
+            <a:spAutoFit/>
+          </a:bodyPr>
+          <a:lstStyle/>
+          <a:p>
+            <a:pPr>
+              <a:defRPr sz="3000" b="1"/>
+            </a:pPr>
+            <a:r>
+              <a:t>Loss and Weighting Table</a:t>
+            </a:r>
+          </a:p>
+        </p:txBody>
+      </p:sp>
+      <p:graphicFrame>
+        <p:nvGraphicFramePr>
+          <p:cNvPr id="3" name="Table 2"/>
+          <p:cNvGraphicFramePr>
+            <a:graphicFrameLocks noGrp="1"/>
+          </p:cNvGraphicFramePr>
+          <p:nvPr/>
+        </p:nvGraphicFramePr>
+        <p:xfrm>
+          <a:off x="548640" y="914400"/>
+          <a:ext cx="11064240" cy="5394960"/>
+        </p:xfrm>
+        <a:graphic>
+          <a:graphicData uri="http://schemas.openxmlformats.org/drawingml/2006/table">
+            <a:tbl>
+              <a:tblPr firstRow="1" bandRow="1">
+                <a:tableStyleId>{5C22544A-7EE6-4342-B048-85BDC9FD1C3A}</a:tableStyleId>
+              </a:tblPr>
+              <a:tblGrid>
+                <a:gridCol w="2212848"/>
+                <a:gridCol w="2212848"/>
+                <a:gridCol w="2212848"/>
+                <a:gridCol w="2212848"/>
+                <a:gridCol w="2212848"/>
+              </a:tblGrid>
+              <a:tr h="899160">
+                <a:tc>
+                  <a:txBody>
+                    <a:bodyPr/>
+                    <a:lstStyle/>
+                    <a:p>
+                      <a:pPr>
+                        <a:defRPr b="1" sz="1300"/>
+                      </a:pPr>
+                      <a:r>
+                        <a:t>Task</a:t>
+                      </a:r>
+                    </a:p>
+                  </a:txBody>
+                  <a:tcPr/>
+                </a:tc>
+                <a:tc>
+                  <a:txBody>
+                    <a:bodyPr/>
+                    <a:lstStyle/>
+                    <a:p>
+                      <a:pPr>
+                        <a:defRPr b="1" sz="1300"/>
+                      </a:pPr>
+                      <a:r>
+                        <a:t>Loss</a:t>
+                      </a:r>
+                    </a:p>
+                  </a:txBody>
+                  <a:tcPr/>
+                </a:tc>
+                <a:tc>
+                  <a:txBody>
+                    <a:bodyPr/>
+                    <a:lstStyle/>
+                    <a:p>
+                      <a:pPr>
+                        <a:defRPr b="1" sz="1300"/>
+                      </a:pPr>
+                      <a:r>
+                        <a:t>Weight</a:t>
+                      </a:r>
+                    </a:p>
+                  </a:txBody>
+                  <a:tcPr/>
+                </a:tc>
+                <a:tc>
+                  <a:txBody>
+                    <a:bodyPr/>
+                    <a:lstStyle/>
+                    <a:p>
+                      <a:pPr>
+                        <a:defRPr b="1" sz="1300"/>
+                      </a:pPr>
+                      <a:r>
+                        <a:t>Class Handling</a:t>
+                      </a:r>
+                    </a:p>
+                  </a:txBody>
+                  <a:tcPr/>
+                </a:tc>
+                <a:tc>
+                  <a:txBody>
+                    <a:bodyPr/>
+                    <a:lstStyle/>
+                    <a:p>
+                      <a:pPr>
+                        <a:defRPr b="1" sz="1300"/>
+                      </a:pPr>
+                      <a:r>
+                        <a:t>Why</a:t>
+                      </a:r>
+                    </a:p>
+                  </a:txBody>
+                  <a:tcPr/>
+                </a:tc>
+              </a:tr>
+              <a:tr h="899160">
+                <a:tc>
+                  <a:txBody>
+                    <a:bodyPr/>
+                    <a:lstStyle/>
+                    <a:p>
+                      <a:pPr>
+                        <a:defRPr sz="1100"/>
+                      </a:pPr>
+                      <a:r>
+                        <a:t>Binding</a:t>
+                      </a:r>
+                    </a:p>
+                  </a:txBody>
+                  <a:tcPr/>
+                </a:tc>
+                <a:tc>
+                  <a:txBody>
+                    <a:bodyPr/>
+                    <a:lstStyle/>
+                    <a:p>
+                      <a:pPr>
+                        <a:defRPr sz="1100"/>
+                      </a:pPr>
+                      <a:r>
+                        <a:t>MSE</a:t>
+                      </a:r>
+                    </a:p>
+                  </a:txBody>
+                  <a:tcPr/>
+                </a:tc>
+                <a:tc>
+                  <a:txBody>
+                    <a:bodyPr/>
+                    <a:lstStyle/>
+                    <a:p>
+                      <a:pPr>
+                        <a:defRPr sz="1100"/>
+                      </a:pPr>
+                      <a:r>
+                        <a:t>w_binding=1.8</a:t>
+                      </a:r>
+                    </a:p>
+                  </a:txBody>
+                  <a:tcPr/>
+                </a:tc>
+                <a:tc>
+                  <a:txBody>
+                    <a:bodyPr/>
+                    <a:lstStyle/>
+                    <a:p>
+                      <a:pPr>
+                        <a:defRPr sz="1100"/>
+                      </a:pPr>
+                      <a:r>
+                        <a:t>N/A</a:t>
+                      </a:r>
+                    </a:p>
+                  </a:txBody>
+                  <a:tcPr/>
+                </a:tc>
+                <a:tc>
+                  <a:txBody>
+                    <a:bodyPr/>
+                    <a:lstStyle/>
+                    <a:p>
+                      <a:pPr>
+                        <a:defRPr sz="1100"/>
+                      </a:pPr>
+                      <a:r>
+                        <a:t>Primary efficacy regression</a:t>
+                      </a:r>
+                    </a:p>
+                  </a:txBody>
+                  <a:tcPr/>
+                </a:tc>
+              </a:tr>
+              <a:tr h="899160">
+                <a:tc>
+                  <a:txBody>
+                    <a:bodyPr/>
+                    <a:lstStyle/>
+                    <a:p>
+                      <a:pPr>
+                        <a:defRPr sz="1100"/>
+                      </a:pPr>
+                      <a:r>
+                        <a:t>hERG</a:t>
+                      </a:r>
+                    </a:p>
+                  </a:txBody>
+                  <a:tcPr/>
+                </a:tc>
+                <a:tc>
+                  <a:txBody>
+                    <a:bodyPr/>
+                    <a:lstStyle/>
+                    <a:p>
+                      <a:pPr>
+                        <a:defRPr sz="1100"/>
+                      </a:pPr>
+                      <a:r>
+                        <a:t>BCE/Focal logits</a:t>
+                      </a:r>
+                    </a:p>
+                  </a:txBody>
+                  <a:tcPr/>
+                </a:tc>
+                <a:tc>
+                  <a:txBody>
+                    <a:bodyPr/>
+                    <a:lstStyle/>
+                    <a:p>
+                      <a:pPr>
+                        <a:defRPr sz="1100"/>
+                      </a:pPr>
+                      <a:r>
+                        <a:t>w_herg=1.0</a:t>
+                      </a:r>
+                    </a:p>
+                  </a:txBody>
+                  <a:tcPr/>
+                </a:tc>
+                <a:tc>
+                  <a:txBody>
+                    <a:bodyPr/>
+                    <a:lstStyle/>
+                    <a:p>
+                      <a:pPr>
+                        <a:defRPr sz="1100"/>
+                      </a:pPr>
+                      <a:r>
+                        <a:t>pos_weight + focal</a:t>
+                      </a:r>
+                    </a:p>
+                  </a:txBody>
+                  <a:tcPr/>
+                </a:tc>
+                <a:tc>
+                  <a:txBody>
+                    <a:bodyPr/>
+                    <a:lstStyle/>
+                    <a:p>
+                      <a:pPr>
+                        <a:defRPr sz="1100"/>
+                      </a:pPr>
+                      <a:r>
+                        <a:t>Safety class imbalance</a:t>
+                      </a:r>
+                    </a:p>
+                  </a:txBody>
+                  <a:tcPr/>
+                </a:tc>
+              </a:tr>
+              <a:tr h="899160">
+                <a:tc>
+                  <a:txBody>
+                    <a:bodyPr/>
+                    <a:lstStyle/>
+                    <a:p>
+                      <a:pPr>
+                        <a:defRPr sz="1100"/>
+                      </a:pPr>
+                      <a:r>
+                        <a:t>Caco-2</a:t>
+                      </a:r>
+                    </a:p>
+                  </a:txBody>
+                  <a:tcPr/>
+                </a:tc>
+                <a:tc>
+                  <a:txBody>
+                    <a:bodyPr/>
+                    <a:lstStyle/>
+                    <a:p>
+                      <a:pPr>
+                        <a:defRPr sz="1100"/>
+                      </a:pPr>
+                      <a:r>
+                        <a:t>BCE/Focal logits</a:t>
+                      </a:r>
+                    </a:p>
+                  </a:txBody>
+                  <a:tcPr/>
+                </a:tc>
+                <a:tc>
+                  <a:txBody>
+                    <a:bodyPr/>
+                    <a:lstStyle/>
+                    <a:p>
+                      <a:pPr>
+                        <a:defRPr sz="1100"/>
+                      </a:pPr>
+                      <a:r>
+                        <a:t>w_caco2=2.0</a:t>
+                      </a:r>
+                    </a:p>
+                  </a:txBody>
+                  <a:tcPr/>
+                </a:tc>
+                <a:tc>
+                  <a:txBody>
+                    <a:bodyPr/>
+                    <a:lstStyle/>
+                    <a:p>
+                      <a:pPr>
+                        <a:defRPr sz="1100"/>
+                      </a:pPr>
+                      <a:r>
+                        <a:t>pos_weight + focal</a:t>
+                      </a:r>
+                    </a:p>
+                  </a:txBody>
+                  <a:tcPr/>
+                </a:tc>
+                <a:tc>
+                  <a:txBody>
+                    <a:bodyPr/>
+                    <a:lstStyle/>
+                    <a:p>
+                      <a:pPr>
+                        <a:defRPr sz="1100"/>
+                      </a:pPr>
+                      <a:r>
+                        <a:t>Permeability emphasis</a:t>
+                      </a:r>
+                    </a:p>
+                  </a:txBody>
+                  <a:tcPr/>
+                </a:tc>
+              </a:tr>
+              <a:tr h="899160">
+                <a:tc>
+                  <a:txBody>
+                    <a:bodyPr/>
+                    <a:lstStyle/>
+                    <a:p>
+                      <a:pPr>
+                        <a:defRPr sz="1100"/>
+                      </a:pPr>
+                      <a:r>
+                        <a:t>Clearance</a:t>
+                      </a:r>
+                    </a:p>
+                  </a:txBody>
+                  <a:tcPr/>
+                </a:tc>
+                <a:tc>
+                  <a:txBody>
+                    <a:bodyPr/>
+                    <a:lstStyle/>
+                    <a:p>
+                      <a:pPr>
+                        <a:defRPr sz="1100"/>
+                      </a:pPr>
+                      <a:r>
+                        <a:t>MSE</a:t>
+                      </a:r>
+                    </a:p>
+                  </a:txBody>
+                  <a:tcPr/>
+                </a:tc>
+                <a:tc>
+                  <a:txBody>
+                    <a:bodyPr/>
+                    <a:lstStyle/>
+                    <a:p>
+                      <a:pPr>
+                        <a:defRPr sz="1100"/>
+                      </a:pPr>
+                      <a:r>
+                        <a:t>w_clearance=1.0</a:t>
+                      </a:r>
+                    </a:p>
+                  </a:txBody>
+                  <a:tcPr/>
+                </a:tc>
+                <a:tc>
+                  <a:txBody>
+                    <a:bodyPr/>
+                    <a:lstStyle/>
+                    <a:p>
+                      <a:pPr>
+                        <a:defRPr sz="1100"/>
+                      </a:pPr>
+                      <a:r>
+                        <a:t>N/A</a:t>
+                      </a:r>
+                    </a:p>
+                  </a:txBody>
+                  <a:tcPr/>
+                </a:tc>
+                <a:tc>
+                  <a:txBody>
+                    <a:bodyPr/>
+                    <a:lstStyle/>
+                    <a:p>
+                      <a:pPr>
+                        <a:defRPr sz="1100"/>
+                      </a:pPr>
+                      <a:r>
+                        <a:t>PK endpoint accuracy</a:t>
+                      </a:r>
+                    </a:p>
+                  </a:txBody>
+                  <a:tcPr/>
+                </a:tc>
+              </a:tr>
+              <a:tr h="899160">
+                <a:tc>
+                  <a:txBody>
+                    <a:bodyPr/>
+                    <a:lstStyle/>
+                    <a:p>
+                      <a:pPr>
+                        <a:defRPr sz="1100"/>
+                      </a:pPr>
+                      <a:r>
+                        <a:t>Physics</a:t>
+                      </a:r>
+                    </a:p>
+                  </a:txBody>
+                  <a:tcPr/>
+                </a:tc>
+                <a:tc>
+                  <a:txBody>
+                    <a:bodyPr/>
+                    <a:lstStyle/>
+                    <a:p>
+                      <a:pPr>
+                        <a:defRPr sz="1100"/>
+                      </a:pPr>
+                      <a:r>
+                        <a:t>Penalty term</a:t>
+                      </a:r>
+                    </a:p>
+                  </a:txBody>
+                  <a:tcPr/>
+                </a:tc>
+                <a:tc>
+                  <a:txBody>
+                    <a:bodyPr/>
+                    <a:lstStyle/>
+                    <a:p>
+                      <a:pPr>
+                        <a:defRPr sz="1100"/>
+                      </a:pPr>
+                      <a:r>
+                        <a:t>w_physics=0.1</a:t>
+                      </a:r>
+                    </a:p>
+                  </a:txBody>
+                  <a:tcPr/>
+                </a:tc>
+                <a:tc>
+                  <a:txBody>
+                    <a:bodyPr/>
+                    <a:lstStyle/>
+                    <a:p>
+                      <a:pPr>
+                        <a:defRPr sz="1100"/>
+                      </a:pPr>
+                      <a:r>
+                        <a:t>N/A</a:t>
+                      </a:r>
+                    </a:p>
+                  </a:txBody>
+                  <a:tcPr/>
+                </a:tc>
+                <a:tc>
+                  <a:txBody>
+                    <a:bodyPr/>
+                    <a:lstStyle/>
+                    <a:p>
+                      <a:pPr>
+                        <a:defRPr sz="1100"/>
+                      </a:pPr>
+                      <a:r>
+                        <a:t>Monotonic/non-negative PK curves</a:t>
+                      </a:r>
+                    </a:p>
+                  </a:txBody>
+                  <a:tcPr/>
+                </a:tc>
+              </a:tr>
+            </a:tbl>
+          </a:graphicData>
+        </a:graphic>
+      </p:graphicFrame>
+    </p:spTree>
+  </p:cSld>
+  <p:clrMapOvr>
+    <a:masterClrMapping/>
+  </p:clrMapOvr>
+</p:sld>
+</file>
+
+<file path=ppt/slides/slide2.xml><?xml version="1.0" encoding="utf-8"?>
+<p:sld xmlns:a="http://schemas.openxmlformats.org/drawingml/2006/main" xmlns:p="http://schemas.openxmlformats.org/presentationml/2006/main" xmlns:r="http://schemas.openxmlformats.org/officeDocument/2006/relationships">
+  <p:cSld>
+    <p:spTree>
+      <p:nvGrpSpPr>
+        <p:cNvPr id="1" name=""/>
+        <p:cNvGrpSpPr/>
+        <p:nvPr/>
+      </p:nvGrpSpPr>
+      <p:grpSpPr/>
+      <p:sp>
+        <p:nvSpPr>
+          <p:cNvPr id="2" name="Title 1"/>
+          <p:cNvSpPr>
+            <a:spLocks noGrp="1"/>
+          </p:cNvSpPr>
+          <p:nvPr>
+            <p:ph type="title"/>
+          </p:nvPr>
+        </p:nvSpPr>
+        <p:spPr/>
+        <p:txBody>
+          <a:bodyPr/>
+          <a:lstStyle/>
+          <a:p>
+            <a:pPr>
+              <a:defRPr sz="3000"/>
+            </a:pPr>
+            <a:r>
+              <a:t>Agenda</a:t>
+            </a:r>
+          </a:p>
+        </p:txBody>
+      </p:sp>
+      <p:sp>
+        <p:nvSpPr>
+          <p:cNvPr id="3" name="Content Placeholder 2"/>
+          <p:cNvSpPr>
+            <a:spLocks noGrp="1"/>
+          </p:cNvSpPr>
+          <p:nvPr>
+            <p:ph idx="1"/>
+          </p:nvPr>
+        </p:nvSpPr>
+        <p:spPr/>
+        <p:txBody>
+          <a:bodyPr/>
+          <a:lstStyle/>
+          <a:p>
+            <a:pPr>
+              <a:defRPr sz="1800"/>
+            </a:pPr>
+            <a:r>
+              <a:t>Problem framing and motivation for a unified model.</a:t>
+            </a:r>
+          </a:p>
+          <a:p>
+            <a:pPr>
+              <a:defRPr sz="1800"/>
+            </a:pPr>
+            <a:r>
+              <a:t>Theory behind multi-task learning and Neural ODE dynamics.</a:t>
+            </a:r>
+          </a:p>
+          <a:p>
+            <a:pPr>
+              <a:defRPr sz="1800"/>
+            </a:pPr>
+            <a:r>
+              <a:t>Data construction and feature schema across tasks.</a:t>
+            </a:r>
+          </a:p>
+          <a:p>
+            <a:pPr>
+              <a:defRPr sz="1800"/>
+            </a:pPr>
+            <a:r>
+              <a:t>Detailed architecture, loss design, and training protocol.</a:t>
+            </a:r>
+          </a:p>
+          <a:p>
+            <a:pPr>
+              <a:defRPr sz="1800"/>
+            </a:pPr>
+            <a:r>
+              <a:t>Results interpretation, risks, and next experimental plan.</a:t>
+            </a:r>
+          </a:p>
+        </p:txBody>
+      </p:sp>
+    </p:spTree>
+  </p:cSld>
+  <p:clrMapOvr>
+    <a:masterClrMapping/>
+  </p:clrMapOvr>
+</p:sld>
+</file>
+
+<file path=ppt/slides/slide20.xml><?xml version="1.0" encoding="utf-8"?>
+<p:sld xmlns:a="http://schemas.openxmlformats.org/drawingml/2006/main" xmlns:p="http://schemas.openxmlformats.org/presentationml/2006/main" xmlns:r="http://schemas.openxmlformats.org/officeDocument/2006/relationships">
+  <p:cSld>
+    <p:spTree>
+      <p:nvGrpSpPr>
+        <p:cNvPr id="1" name=""/>
+        <p:cNvGrpSpPr/>
+        <p:nvPr/>
+      </p:nvGrpSpPr>
+      <p:grpSpPr/>
+      <p:sp>
+        <p:nvSpPr>
+          <p:cNvPr id="2" name="TextBox 1"/>
+          <p:cNvSpPr txBox="1"/>
+          <p:nvPr/>
+        </p:nvSpPr>
+        <p:spPr>
+          <a:xfrm>
+            <a:off x="548640" y="182880"/>
+            <a:ext cx="10972800" cy="640080"/>
+          </a:xfrm>
+          <a:prstGeom prst="rect">
+            <a:avLst/>
+          </a:prstGeom>
+          <a:noFill/>
+        </p:spPr>
+        <p:txBody>
+          <a:bodyPr wrap="none">
+            <a:spAutoFit/>
+          </a:bodyPr>
+          <a:lstStyle/>
+          <a:p>
+            <a:pPr>
+              <a:defRPr sz="3000" b="1"/>
+            </a:pPr>
+            <a:r>
+              <a:t>Hyperparameter Table Snapshot</a:t>
+            </a:r>
+          </a:p>
+        </p:txBody>
+      </p:sp>
+      <p:graphicFrame>
+        <p:nvGraphicFramePr>
+          <p:cNvPr id="3" name="Table 2"/>
+          <p:cNvGraphicFramePr>
+            <a:graphicFrameLocks noGrp="1"/>
+          </p:cNvGraphicFramePr>
+          <p:nvPr/>
+        </p:nvGraphicFramePr>
+        <p:xfrm>
+          <a:off x="548640" y="914400"/>
+          <a:ext cx="11064240" cy="5394960"/>
+        </p:xfrm>
+        <a:graphic>
+          <a:graphicData uri="http://schemas.openxmlformats.org/drawingml/2006/table">
+            <a:tbl>
+              <a:tblPr firstRow="1" bandRow="1">
+                <a:tableStyleId>{5C22544A-7EE6-4342-B048-85BDC9FD1C3A}</a:tableStyleId>
+              </a:tblPr>
+              <a:tblGrid>
+                <a:gridCol w="2766060"/>
+                <a:gridCol w="2766060"/>
+                <a:gridCol w="2766060"/>
+                <a:gridCol w="2766060"/>
+              </a:tblGrid>
+              <a:tr h="490450">
+                <a:tc>
+                  <a:txBody>
+                    <a:bodyPr/>
+                    <a:lstStyle/>
+                    <a:p>
+                      <a:pPr>
+                        <a:defRPr b="1" sz="1300"/>
+                      </a:pPr>
+                      <a:r>
+                        <a:t>Hyperparameter</a:t>
+                      </a:r>
+                    </a:p>
+                  </a:txBody>
+                  <a:tcPr/>
+                </a:tc>
+                <a:tc>
+                  <a:txBody>
+                    <a:bodyPr/>
+                    <a:lstStyle/>
+                    <a:p>
+                      <a:pPr>
+                        <a:defRPr b="1" sz="1300"/>
+                      </a:pPr>
+                      <a:r>
+                        <a:t>Value</a:t>
+                      </a:r>
+                    </a:p>
+                  </a:txBody>
+                  <a:tcPr/>
+                </a:tc>
+                <a:tc>
+                  <a:txBody>
+                    <a:bodyPr/>
+                    <a:lstStyle/>
+                    <a:p>
+                      <a:pPr>
+                        <a:defRPr b="1" sz="1300"/>
+                      </a:pPr>
+                      <a:r>
+                        <a:t>Role</a:t>
+                      </a:r>
+                    </a:p>
+                  </a:txBody>
+                  <a:tcPr/>
+                </a:tc>
+                <a:tc>
+                  <a:txBody>
+                    <a:bodyPr/>
+                    <a:lstStyle/>
+                    <a:p>
+                      <a:pPr>
+                        <a:defRPr b="1" sz="1300"/>
+                      </a:pPr>
+                      <a:r>
+                        <a:t>Expected Impact</a:t>
+                      </a:r>
+                    </a:p>
+                  </a:txBody>
+                  <a:tcPr/>
+                </a:tc>
+              </a:tr>
+              <a:tr h="490450">
+                <a:tc>
+                  <a:txBody>
+                    <a:bodyPr/>
+                    <a:lstStyle/>
+                    <a:p>
+                      <a:pPr>
+                        <a:defRPr sz="1100"/>
+                      </a:pPr>
+                      <a:r>
+                        <a:t>input_dim</a:t>
+                      </a:r>
+                    </a:p>
+                  </a:txBody>
+                  <a:tcPr/>
+                </a:tc>
+                <a:tc>
+                  <a:txBody>
+                    <a:bodyPr/>
+                    <a:lstStyle/>
+                    <a:p>
+                      <a:pPr>
+                        <a:defRPr sz="1100"/>
+                      </a:pPr>
+                      <a:r>
+                        <a:t>2051</a:t>
+                      </a:r>
+                    </a:p>
+                  </a:txBody>
+                  <a:tcPr/>
+                </a:tc>
+                <a:tc>
+                  <a:txBody>
+                    <a:bodyPr/>
+                    <a:lstStyle/>
+                    <a:p>
+                      <a:pPr>
+                        <a:defRPr sz="1100"/>
+                      </a:pPr>
+                      <a:r>
+                        <a:t>Input feature width</a:t>
+                      </a:r>
+                    </a:p>
+                  </a:txBody>
+                  <a:tcPr/>
+                </a:tc>
+                <a:tc>
+                  <a:txBody>
+                    <a:bodyPr/>
+                    <a:lstStyle/>
+                    <a:p>
+                      <a:pPr>
+                        <a:defRPr sz="1100"/>
+                      </a:pPr>
+                      <a:r>
+                        <a:t>Capacity and memory footprint</a:t>
+                      </a:r>
+                    </a:p>
+                  </a:txBody>
+                  <a:tcPr/>
+                </a:tc>
+              </a:tr>
+              <a:tr h="490450">
+                <a:tc>
+                  <a:txBody>
+                    <a:bodyPr/>
+                    <a:lstStyle/>
+                    <a:p>
+                      <a:pPr>
+                        <a:defRPr sz="1100"/>
+                      </a:pPr>
+                      <a:r>
+                        <a:t>hidden_dim</a:t>
+                      </a:r>
+                    </a:p>
+                  </a:txBody>
+                  <a:tcPr/>
+                </a:tc>
+                <a:tc>
+                  <a:txBody>
+                    <a:bodyPr/>
+                    <a:lstStyle/>
+                    <a:p>
+                      <a:pPr>
+                        <a:defRPr sz="1100"/>
+                      </a:pPr>
+                      <a:r>
+                        <a:t>128</a:t>
+                      </a:r>
+                    </a:p>
+                  </a:txBody>
+                  <a:tcPr/>
+                </a:tc>
+                <a:tc>
+                  <a:txBody>
+                    <a:bodyPr/>
+                    <a:lstStyle/>
+                    <a:p>
+                      <a:pPr>
+                        <a:defRPr sz="1100"/>
+                      </a:pPr>
+                      <a:r>
+                        <a:t>Shared encoder width</a:t>
+                      </a:r>
+                    </a:p>
+                  </a:txBody>
+                  <a:tcPr/>
+                </a:tc>
+                <a:tc>
+                  <a:txBody>
+                    <a:bodyPr/>
+                    <a:lstStyle/>
+                    <a:p>
+                      <a:pPr>
+                        <a:defRPr sz="1100"/>
+                      </a:pPr>
+                      <a:r>
+                        <a:t>Representation power vs overfit risk</a:t>
+                      </a:r>
+                    </a:p>
+                  </a:txBody>
+                  <a:tcPr/>
+                </a:tc>
+              </a:tr>
+              <a:tr h="490450">
+                <a:tc>
+                  <a:txBody>
+                    <a:bodyPr/>
+                    <a:lstStyle/>
+                    <a:p>
+                      <a:pPr>
+                        <a:defRPr sz="1100"/>
+                      </a:pPr>
+                      <a:r>
+                        <a:t>latent_dim</a:t>
+                      </a:r>
+                    </a:p>
+                  </a:txBody>
+                  <a:tcPr/>
+                </a:tc>
+                <a:tc>
+                  <a:txBody>
+                    <a:bodyPr/>
+                    <a:lstStyle/>
+                    <a:p>
+                      <a:pPr>
+                        <a:defRPr sz="1100"/>
+                      </a:pPr>
+                      <a:r>
+                        <a:t>64</a:t>
+                      </a:r>
+                    </a:p>
+                  </a:txBody>
+                  <a:tcPr/>
+                </a:tc>
+                <a:tc>
+                  <a:txBody>
+                    <a:bodyPr/>
+                    <a:lstStyle/>
+                    <a:p>
+                      <a:pPr>
+                        <a:defRPr sz="1100"/>
+                      </a:pPr>
+                      <a:r>
+                        <a:t>Latent bottleneck size</a:t>
+                      </a:r>
+                    </a:p>
+                  </a:txBody>
+                  <a:tcPr/>
+                </a:tc>
+                <a:tc>
+                  <a:txBody>
+                    <a:bodyPr/>
+                    <a:lstStyle/>
+                    <a:p>
+                      <a:pPr>
+                        <a:defRPr sz="1100"/>
+                      </a:pPr>
+                      <a:r>
+                        <a:t>Compression vs transfer</a:t>
+                      </a:r>
+                    </a:p>
+                  </a:txBody>
+                  <a:tcPr/>
+                </a:tc>
+              </a:tr>
+              <a:tr h="490450">
+                <a:tc>
+                  <a:txBody>
+                    <a:bodyPr/>
+                    <a:lstStyle/>
+                    <a:p>
+                      <a:pPr>
+                        <a:defRPr sz="1100"/>
+                      </a:pPr>
+                      <a:r>
+                        <a:t>dropout</a:t>
+                      </a:r>
+                    </a:p>
+                  </a:txBody>
+                  <a:tcPr/>
+                </a:tc>
+                <a:tc>
+                  <a:txBody>
+                    <a:bodyPr/>
+                    <a:lstStyle/>
+                    <a:p>
+                      <a:pPr>
+                        <a:defRPr sz="1100"/>
+                      </a:pPr>
+                      <a:r>
+                        <a:t>0.2</a:t>
+                      </a:r>
+                    </a:p>
+                  </a:txBody>
+                  <a:tcPr/>
+                </a:tc>
+                <a:tc>
+                  <a:txBody>
+                    <a:bodyPr/>
+                    <a:lstStyle/>
+                    <a:p>
+                      <a:pPr>
+                        <a:defRPr sz="1100"/>
+                      </a:pPr>
+                      <a:r>
+                        <a:t>Encoder regularization</a:t>
+                      </a:r>
+                    </a:p>
+                  </a:txBody>
+                  <a:tcPr/>
+                </a:tc>
+                <a:tc>
+                  <a:txBody>
+                    <a:bodyPr/>
+                    <a:lstStyle/>
+                    <a:p>
+                      <a:pPr>
+                        <a:defRPr sz="1100"/>
+                      </a:pPr>
+                      <a:r>
+                        <a:t>Generalization stability</a:t>
+                      </a:r>
+                    </a:p>
+                  </a:txBody>
+                  <a:tcPr/>
+                </a:tc>
+              </a:tr>
+              <a:tr h="490450">
+                <a:tc>
+                  <a:txBody>
+                    <a:bodyPr/>
+                    <a:lstStyle/>
+                    <a:p>
+                      <a:pPr>
+                        <a:defRPr sz="1100"/>
+                      </a:pPr>
+                      <a:r>
+                        <a:t>batch_size</a:t>
+                      </a:r>
+                    </a:p>
+                  </a:txBody>
+                  <a:tcPr/>
+                </a:tc>
+                <a:tc>
+                  <a:txBody>
+                    <a:bodyPr/>
+                    <a:lstStyle/>
+                    <a:p>
+                      <a:pPr>
+                        <a:defRPr sz="1100"/>
+                      </a:pPr>
+                      <a:r>
+                        <a:t>64</a:t>
+                      </a:r>
+                    </a:p>
+                  </a:txBody>
+                  <a:tcPr/>
+                </a:tc>
+                <a:tc>
+                  <a:txBody>
+                    <a:bodyPr/>
+                    <a:lstStyle/>
+                    <a:p>
+                      <a:pPr>
+                        <a:defRPr sz="1100"/>
+                      </a:pPr>
+                      <a:r>
+                        <a:t>Batch granularity</a:t>
+                      </a:r>
+                    </a:p>
+                  </a:txBody>
+                  <a:tcPr/>
+                </a:tc>
+                <a:tc>
+                  <a:txBody>
+                    <a:bodyPr/>
+                    <a:lstStyle/>
+                    <a:p>
+                      <a:pPr>
+                        <a:defRPr sz="1100"/>
+                      </a:pPr>
+                      <a:r>
+                        <a:t>Gradient stability / throughput</a:t>
+                      </a:r>
+                    </a:p>
+                  </a:txBody>
+                  <a:tcPr/>
+                </a:tc>
+              </a:tr>
+              <a:tr h="490450">
+                <a:tc>
+                  <a:txBody>
+                    <a:bodyPr/>
+                    <a:lstStyle/>
+                    <a:p>
+                      <a:pPr>
+                        <a:defRPr sz="1100"/>
+                      </a:pPr>
+                      <a:r>
+                        <a:t>learning_rate</a:t>
+                      </a:r>
+                    </a:p>
+                  </a:txBody>
+                  <a:tcPr/>
+                </a:tc>
+                <a:tc>
+                  <a:txBody>
+                    <a:bodyPr/>
+                    <a:lstStyle/>
+                    <a:p>
+                      <a:pPr>
+                        <a:defRPr sz="1100"/>
+                      </a:pPr>
+                      <a:r>
+                        <a:t>1e-3</a:t>
+                      </a:r>
+                    </a:p>
+                  </a:txBody>
+                  <a:tcPr/>
+                </a:tc>
+                <a:tc>
+                  <a:txBody>
+                    <a:bodyPr/>
+                    <a:lstStyle/>
+                    <a:p>
+                      <a:pPr>
+                        <a:defRPr sz="1100"/>
+                      </a:pPr>
+                      <a:r>
+                        <a:t>Optimizer step size</a:t>
+                      </a:r>
+                    </a:p>
+                  </a:txBody>
+                  <a:tcPr/>
+                </a:tc>
+                <a:tc>
+                  <a:txBody>
+                    <a:bodyPr/>
+                    <a:lstStyle/>
+                    <a:p>
+                      <a:pPr>
+                        <a:defRPr sz="1100"/>
+                      </a:pPr>
+                      <a:r>
+                        <a:t>Convergence speed and stability</a:t>
+                      </a:r>
+                    </a:p>
+                  </a:txBody>
+                  <a:tcPr/>
+                </a:tc>
+              </a:tr>
+              <a:tr h="490450">
+                <a:tc>
+                  <a:txBody>
+                    <a:bodyPr/>
+                    <a:lstStyle/>
+                    <a:p>
+                      <a:pPr>
+                        <a:defRPr sz="1100"/>
+                      </a:pPr>
+                      <a:r>
+                        <a:t>weight_decay</a:t>
+                      </a:r>
+                    </a:p>
+                  </a:txBody>
+                  <a:tcPr/>
+                </a:tc>
+                <a:tc>
+                  <a:txBody>
+                    <a:bodyPr/>
+                    <a:lstStyle/>
+                    <a:p>
+                      <a:pPr>
+                        <a:defRPr sz="1100"/>
+                      </a:pPr>
+                      <a:r>
+                        <a:t>1e-4</a:t>
+                      </a:r>
+                    </a:p>
+                  </a:txBody>
+                  <a:tcPr/>
+                </a:tc>
+                <a:tc>
+                  <a:txBody>
+                    <a:bodyPr/>
+                    <a:lstStyle/>
+                    <a:p>
+                      <a:pPr>
+                        <a:defRPr sz="1100"/>
+                      </a:pPr>
+                      <a:r>
+                        <a:t>L2 regularization</a:t>
+                      </a:r>
+                    </a:p>
+                  </a:txBody>
+                  <a:tcPr/>
+                </a:tc>
+                <a:tc>
+                  <a:txBody>
+                    <a:bodyPr/>
+                    <a:lstStyle/>
+                    <a:p>
+                      <a:pPr>
+                        <a:defRPr sz="1100"/>
+                      </a:pPr>
+                      <a:r>
+                        <a:t>Prevents parameter blow-up</a:t>
+                      </a:r>
+                    </a:p>
+                  </a:txBody>
+                  <a:tcPr/>
+                </a:tc>
+              </a:tr>
+              <a:tr h="490450">
+                <a:tc>
+                  <a:txBody>
+                    <a:bodyPr/>
+                    <a:lstStyle/>
+                    <a:p>
+                      <a:pPr>
+                        <a:defRPr sz="1100"/>
+                      </a:pPr>
+                      <a:r>
+                        <a:t>patience</a:t>
+                      </a:r>
+                    </a:p>
+                  </a:txBody>
+                  <a:tcPr/>
+                </a:tc>
+                <a:tc>
+                  <a:txBody>
+                    <a:bodyPr/>
+                    <a:lstStyle/>
+                    <a:p>
+                      <a:pPr>
+                        <a:defRPr sz="1100"/>
+                      </a:pPr>
+                      <a:r>
+                        <a:t>40</a:t>
+                      </a:r>
+                    </a:p>
+                  </a:txBody>
+                  <a:tcPr/>
+                </a:tc>
+                <a:tc>
+                  <a:txBody>
+                    <a:bodyPr/>
+                    <a:lstStyle/>
+                    <a:p>
+                      <a:pPr>
+                        <a:defRPr sz="1100"/>
+                      </a:pPr>
+                      <a:r>
+                        <a:t>Early stopping tolerance</a:t>
+                      </a:r>
+                    </a:p>
+                  </a:txBody>
+                  <a:tcPr/>
+                </a:tc>
+                <a:tc>
+                  <a:txBody>
+                    <a:bodyPr/>
+                    <a:lstStyle/>
+                    <a:p>
+                      <a:pPr>
+                        <a:defRPr sz="1100"/>
+                      </a:pPr>
+                      <a:r>
+                        <a:t>Avoids premature stopping</a:t>
+                      </a:r>
+                    </a:p>
+                  </a:txBody>
+                  <a:tcPr/>
+                </a:tc>
+              </a:tr>
+              <a:tr h="490450">
+                <a:tc>
+                  <a:txBody>
+                    <a:bodyPr/>
+                    <a:lstStyle/>
+                    <a:p>
+                      <a:pPr>
+                        <a:defRPr sz="1100"/>
+                      </a:pPr>
+                      <a:r>
+                        <a:t>grad_clip</a:t>
+                      </a:r>
+                    </a:p>
+                  </a:txBody>
+                  <a:tcPr/>
+                </a:tc>
+                <a:tc>
+                  <a:txBody>
+                    <a:bodyPr/>
+                    <a:lstStyle/>
+                    <a:p>
+                      <a:pPr>
+                        <a:defRPr sz="1100"/>
+                      </a:pPr>
+                      <a:r>
+                        <a:t>1.0</a:t>
+                      </a:r>
+                    </a:p>
+                  </a:txBody>
+                  <a:tcPr/>
+                </a:tc>
+                <a:tc>
+                  <a:txBody>
+                    <a:bodyPr/>
+                    <a:lstStyle/>
+                    <a:p>
+                      <a:pPr>
+                        <a:defRPr sz="1100"/>
+                      </a:pPr>
+                      <a:r>
+                        <a:t>Gradient clipping threshold</a:t>
+                      </a:r>
+                    </a:p>
+                  </a:txBody>
+                  <a:tcPr/>
+                </a:tc>
+                <a:tc>
+                  <a:txBody>
+                    <a:bodyPr/>
+                    <a:lstStyle/>
+                    <a:p>
+                      <a:pPr>
+                        <a:defRPr sz="1100"/>
+                      </a:pPr>
+                      <a:r>
+                        <a:t>Prevents exploding gradients</a:t>
+                      </a:r>
+                    </a:p>
+                  </a:txBody>
+                  <a:tcPr/>
+                </a:tc>
+              </a:tr>
+              <a:tr h="490460">
+                <a:tc>
+                  <a:txBody>
+                    <a:bodyPr/>
+                    <a:lstStyle/>
+                    <a:p>
+                      <a:pPr>
+                        <a:defRPr sz="1100"/>
+                      </a:pPr>
+                      <a:r>
+                        <a:t>focal_gamma</a:t>
+                      </a:r>
+                    </a:p>
+                  </a:txBody>
+                  <a:tcPr/>
+                </a:tc>
+                <a:tc>
+                  <a:txBody>
+                    <a:bodyPr/>
+                    <a:lstStyle/>
+                    <a:p>
+                      <a:pPr>
+                        <a:defRPr sz="1100"/>
+                      </a:pPr>
+                      <a:r>
+                        <a:t>2.0</a:t>
+                      </a:r>
+                    </a:p>
+                  </a:txBody>
+                  <a:tcPr/>
+                </a:tc>
+                <a:tc>
+                  <a:txBody>
+                    <a:bodyPr/>
+                    <a:lstStyle/>
+                    <a:p>
+                      <a:pPr>
+                        <a:defRPr sz="1100"/>
+                      </a:pPr>
+                      <a:r>
+                        <a:t>Focal loss focus</a:t>
+                      </a:r>
+                    </a:p>
+                  </a:txBody>
+                  <a:tcPr/>
+                </a:tc>
+                <a:tc>
+                  <a:txBody>
+                    <a:bodyPr/>
+                    <a:lstStyle/>
+                    <a:p>
+                      <a:pPr>
+                        <a:defRPr sz="1100"/>
+                      </a:pPr>
+                      <a:r>
+                        <a:t>Emphasizes hard samples</a:t>
+                      </a:r>
+                    </a:p>
+                  </a:txBody>
+                  <a:tcPr/>
+                </a:tc>
+              </a:tr>
+            </a:tbl>
+          </a:graphicData>
+        </a:graphic>
+      </p:graphicFrame>
+    </p:spTree>
+  </p:cSld>
+  <p:clrMapOvr>
+    <a:masterClrMapping/>
+  </p:clrMapOvr>
+</p:sld>
+</file>
+
+<file path=ppt/slides/slide21.xml><?xml version="1.0" encoding="utf-8"?>
+<p:sld xmlns:a="http://schemas.openxmlformats.org/drawingml/2006/main" xmlns:p="http://schemas.openxmlformats.org/presentationml/2006/main" xmlns:r="http://schemas.openxmlformats.org/officeDocument/2006/relationships">
+  <p:cSld>
+    <p:spTree>
+      <p:nvGrpSpPr>
+        <p:cNvPr id="1" name=""/>
+        <p:cNvGrpSpPr/>
+        <p:nvPr/>
+      </p:nvGrpSpPr>
+      <p:grpSpPr/>
+      <p:sp>
+        <p:nvSpPr>
+          <p:cNvPr id="2" name="TextBox 1"/>
+          <p:cNvSpPr txBox="1"/>
+          <p:nvPr/>
+        </p:nvSpPr>
+        <p:spPr>
+          <a:xfrm>
+            <a:off x="548640" y="182880"/>
+            <a:ext cx="10972800" cy="640080"/>
+          </a:xfrm>
+          <a:prstGeom prst="rect">
+            <a:avLst/>
+          </a:prstGeom>
+          <a:noFill/>
+        </p:spPr>
+        <p:txBody>
+          <a:bodyPr wrap="none">
+            <a:spAutoFit/>
+          </a:bodyPr>
+          <a:lstStyle/>
+          <a:p>
+            <a:pPr>
+              <a:defRPr sz="3000" b="1"/>
+            </a:pPr>
+            <a:r>
+              <a:t>Training Dynamics</a:t>
             </a:r>
           </a:p>
         </p:txBody>
@@ -3768,23 +5927,23 @@
               <a:defRPr sz="1800"/>
             </a:pPr>
             <a:r>
-              <a:t>Loss curves show convergence and generalization.</a:t>
-            </a:r>
-          </a:p>
-          <a:p>
-            <a:pPr>
-              <a:defRPr sz="1800"/>
-            </a:pPr>
-            <a:r>
-              <a:t>Task metric trends expose plateau regions.</a:t>
-            </a:r>
-          </a:p>
-          <a:p>
-            <a:pPr>
-              <a:defRPr sz="1800"/>
-            </a:pPr>
-            <a:r>
-              <a:t>Signals where task-specific tuning is needed.</a:t>
+              <a:t>Loss curves characterize convergence and potential overfitting gap.</a:t>
+            </a:r>
+          </a:p>
+          <a:p>
+            <a:pPr>
+              <a:defRPr sz="1800"/>
+            </a:pPr>
+            <a:r>
+              <a:t>Task metric trends identify faster and slower learning tasks.</a:t>
+            </a:r>
+          </a:p>
+          <a:p>
+            <a:pPr>
+              <a:defRPr sz="1800"/>
+            </a:pPr>
+            <a:r>
+              <a:t>Plateau points indicate where task-specific fine-tuning is needed.</a:t>
             </a:r>
           </a:p>
         </p:txBody>
@@ -3797,7 +5956,7 @@
 </p:sld>
 </file>
 
-<file path=ppt/slides/slide17.xml><?xml version="1.0" encoding="utf-8"?>
+<file path=ppt/slides/slide22.xml><?xml version="1.0" encoding="utf-8"?>
 <p:sld xmlns:a="http://schemas.openxmlformats.org/drawingml/2006/main" xmlns:p="http://schemas.openxmlformats.org/presentationml/2006/main" xmlns:r="http://schemas.openxmlformats.org/officeDocument/2006/relationships">
   <p:cSld>
     <p:spTree>
@@ -3833,7 +5992,7 @@
               <a:defRPr sz="3000" b="1"/>
             </a:pPr>
             <a:r>
-              <a:t>Slide 17 - Visual: Neural ODE PK Curves</a:t>
+              <a:t>Neural ODE PK Curves</a:t>
             </a:r>
           </a:p>
         </p:txBody>
@@ -3888,23 +6047,23 @@
               <a:defRPr sz="1800"/>
             </a:pPr>
             <a:r>
-              <a:t>Continuous-time ODE integration output.</a:t>
-            </a:r>
-          </a:p>
-          <a:p>
-            <a:pPr>
-              <a:defRPr sz="1800"/>
-            </a:pPr>
-            <a:r>
-              <a:t>Monotonic decay reflects elimination dynamics.</a:t>
-            </a:r>
-          </a:p>
-          <a:p>
-            <a:pPr>
-              <a:defRPr sz="1800"/>
-            </a:pPr>
-            <a:r>
-              <a:t>Variation reflects inferred CL and V differences.</a:t>
+              <a:t>Curves are generated from continuous-time ODE integration.</a:t>
+            </a:r>
+          </a:p>
+          <a:p>
+            <a:pPr>
+              <a:defRPr sz="1800"/>
+            </a:pPr>
+            <a:r>
+              <a:t>Monotonic decay aligns with first-order elimination assumptions.</a:t>
+            </a:r>
+          </a:p>
+          <a:p>
+            <a:pPr>
+              <a:defRPr sz="1800"/>
+            </a:pPr>
+            <a:r>
+              <a:t>Inter-compound variation reflects inferred CL and V differences.</a:t>
             </a:r>
           </a:p>
         </p:txBody>
@@ -3917,7 +6076,7 @@
 </p:sld>
 </file>
 
-<file path=ppt/slides/slide18.xml><?xml version="1.0" encoding="utf-8"?>
+<file path=ppt/slides/slide23.xml><?xml version="1.0" encoding="utf-8"?>
 <p:sld xmlns:a="http://schemas.openxmlformats.org/drawingml/2006/main" xmlns:p="http://schemas.openxmlformats.org/presentationml/2006/main" xmlns:r="http://schemas.openxmlformats.org/officeDocument/2006/relationships">
   <p:cSld>
     <p:spTree>
@@ -3942,8 +6101,11 @@
           <a:bodyPr/>
           <a:lstStyle/>
           <a:p>
-            <a:r>
-              <a:t>Slide 18 - Summary and Next Work</a:t>
+            <a:pPr>
+              <a:defRPr sz="3000"/>
+            </a:pPr>
+            <a:r>
+              <a:t>Summary and Next Work</a:t>
             </a:r>
           </a:p>
         </p:txBody>
@@ -3964,121 +6126,34 @@
           <a:lstStyle/>
           <a:p>
             <a:pPr>
-              <a:defRPr sz="2000"/>
-            </a:pPr>
-            <a:r>
-              <a:t>Phase 3B provides full reproducible baseline stack.</a:t>
-            </a:r>
-          </a:p>
-          <a:p>
-            <a:pPr>
-              <a:defRPr sz="2000"/>
-            </a:pPr>
-            <a:r>
-              <a:t>Risks: task interference, imbalance sensitivity, threshold dependence.</a:t>
-            </a:r>
-          </a:p>
-          <a:p>
-            <a:pPr>
-              <a:defRPr sz="2000"/>
-            </a:pPr>
-            <a:r>
-              <a:t>Phase 3C: task-focused fine-tuning, loss-weight sweeps, calibration.</a:t>
-            </a:r>
-          </a:p>
-        </p:txBody>
-      </p:sp>
-    </p:spTree>
-  </p:cSld>
-  <p:clrMapOvr>
-    <a:masterClrMapping/>
-  </p:clrMapOvr>
-</p:sld>
-</file>
-
-<file path=ppt/slides/slide2.xml><?xml version="1.0" encoding="utf-8"?>
-<p:sld xmlns:a="http://schemas.openxmlformats.org/drawingml/2006/main" xmlns:p="http://schemas.openxmlformats.org/presentationml/2006/main" xmlns:r="http://schemas.openxmlformats.org/officeDocument/2006/relationships">
-  <p:cSld>
-    <p:spTree>
-      <p:nvGrpSpPr>
-        <p:cNvPr id="1" name=""/>
-        <p:cNvGrpSpPr/>
-        <p:nvPr/>
-      </p:nvGrpSpPr>
-      <p:grpSpPr/>
-      <p:sp>
-        <p:nvSpPr>
-          <p:cNvPr id="2" name="Title 1"/>
-          <p:cNvSpPr>
-            <a:spLocks noGrp="1"/>
-          </p:cNvSpPr>
-          <p:nvPr>
-            <p:ph type="title"/>
-          </p:nvPr>
-        </p:nvSpPr>
-        <p:spPr/>
-        <p:txBody>
-          <a:bodyPr/>
-          <a:lstStyle/>
-          <a:p>
-            <a:r>
-              <a:t>Slide 2 - Agenda</a:t>
-            </a:r>
-          </a:p>
-        </p:txBody>
-      </p:sp>
-      <p:sp>
-        <p:nvSpPr>
-          <p:cNvPr id="3" name="Content Placeholder 2"/>
-          <p:cNvSpPr>
-            <a:spLocks noGrp="1"/>
-          </p:cNvSpPr>
-          <p:nvPr>
-            <p:ph idx="1"/>
-          </p:nvPr>
-        </p:nvSpPr>
-        <p:spPr/>
-        <p:txBody>
-          <a:bodyPr/>
-          <a:lstStyle/>
-          <a:p>
-            <a:pPr>
-              <a:defRPr sz="2000"/>
-            </a:pPr>
-            <a:r>
-              <a:t>Problem framing</a:t>
-            </a:r>
-          </a:p>
-          <a:p>
-            <a:pPr>
-              <a:defRPr sz="2000"/>
-            </a:pPr>
-            <a:r>
-              <a:t>Theoretical basis</a:t>
-            </a:r>
-          </a:p>
-          <a:p>
-            <a:pPr>
-              <a:defRPr sz="2000"/>
-            </a:pPr>
-            <a:r>
-              <a:t>Data and feature design</a:t>
-            </a:r>
-          </a:p>
-          <a:p>
-            <a:pPr>
-              <a:defRPr sz="2000"/>
-            </a:pPr>
-            <a:r>
-              <a:t>Architecture and training protocol</a:t>
-            </a:r>
-          </a:p>
-          <a:p>
-            <a:pPr>
-              <a:defRPr sz="2000"/>
-            </a:pPr>
-            <a:r>
-              <a:t>Results, risks, and next experiments</a:t>
+              <a:defRPr sz="1800"/>
+            </a:pPr>
+            <a:r>
+              <a:t>Phase 3B delivers a complete and reproducible baseline pipeline.</a:t>
+            </a:r>
+          </a:p>
+          <a:p>
+            <a:pPr>
+              <a:defRPr sz="1800"/>
+            </a:pPr>
+            <a:r>
+              <a:t>Main technical risks are task interference, imbalance sensitivity, and threshold dependence.</a:t>
+            </a:r>
+          </a:p>
+          <a:p>
+            <a:pPr>
+              <a:defRPr sz="1800"/>
+            </a:pPr>
+            <a:r>
+              <a:t>Phase 3C will focus on targeted fine-tuning, loss-weight sweeps, and calibration.</a:t>
+            </a:r>
+          </a:p>
+          <a:p>
+            <a:pPr>
+              <a:defRPr sz="1800"/>
+            </a:pPr>
+            <a:r>
+              <a:t>The current system is ready for controlled optimization rather than redesign.</a:t>
             </a:r>
           </a:p>
         </p:txBody>
@@ -4116,8 +6191,11 @@
           <a:bodyPr/>
           <a:lstStyle/>
           <a:p>
-            <a:r>
-              <a:t>Slide 3 - Problem Framing</a:t>
+            <a:pPr>
+              <a:defRPr sz="3000"/>
+            </a:pPr>
+            <a:r>
+              <a:t>Problem Framing</a:t>
             </a:r>
           </a:p>
         </p:txBody>
@@ -4138,26 +6216,34 @@
           <a:lstStyle/>
           <a:p>
             <a:pPr>
-              <a:defRPr sz="2000"/>
-            </a:pPr>
-            <a:r>
-              <a:t>Need one model across efficacy and ADMET endpoints.</a:t>
-            </a:r>
-          </a:p>
-          <a:p>
-            <a:pPr>
-              <a:defRPr sz="2000"/>
-            </a:pPr>
-            <a:r>
-              <a:t>Single-task setups miss transferable molecular signal.</a:t>
-            </a:r>
-          </a:p>
-          <a:p>
-            <a:pPr>
-              <a:defRPr sz="2000"/>
-            </a:pPr>
-            <a:r>
-              <a:t>PK-PD workflows need mechanistic trajectory behavior.</a:t>
+              <a:defRPr sz="1800"/>
+            </a:pPr>
+            <a:r>
+              <a:t>Drug programs require simultaneous modeling of efficacy and ADMET endpoints.</a:t>
+            </a:r>
+          </a:p>
+          <a:p>
+            <a:pPr>
+              <a:defRPr sz="1800"/>
+            </a:pPr>
+            <a:r>
+              <a:t>Single-task pipelines underuse transferable molecular information.</a:t>
+            </a:r>
+          </a:p>
+          <a:p>
+            <a:pPr>
+              <a:defRPr sz="1800"/>
+            </a:pPr>
+            <a:r>
+              <a:t>PK-PD decisions require interpretable trajectory behavior, not only endpoint scores.</a:t>
+            </a:r>
+          </a:p>
+          <a:p>
+            <a:pPr>
+              <a:defRPr sz="1800"/>
+            </a:pPr>
+            <a:r>
+              <a:t>Goal: combine predictive power and mechanistic consistency in one stack.</a:t>
             </a:r>
           </a:p>
         </p:txBody>
@@ -4195,8 +6281,11 @@
           <a:bodyPr/>
           <a:lstStyle/>
           <a:p>
-            <a:r>
-              <a:t>Slide 4 - Why Multi-Task Learning</a:t>
+            <a:pPr>
+              <a:defRPr sz="3000"/>
+            </a:pPr>
+            <a:r>
+              <a:t>Why Multi-Task Learning</a:t>
             </a:r>
           </a:p>
         </p:txBody>
@@ -4217,26 +6306,34 @@
           <a:lstStyle/>
           <a:p>
             <a:pPr>
-              <a:defRPr sz="2000"/>
-            </a:pPr>
-            <a:r>
-              <a:t>Shared encoder induces representation transfer.</a:t>
-            </a:r>
-          </a:p>
-          <a:p>
-            <a:pPr>
-              <a:defRPr sz="2000"/>
-            </a:pPr>
-            <a:r>
-              <a:t>Hard parameter sharing reduces overfitting on small tasks.</a:t>
-            </a:r>
-          </a:p>
-          <a:p>
-            <a:pPr>
-              <a:defRPr sz="2000"/>
-            </a:pPr>
-            <a:r>
-              <a:t>Task heads preserve specialization for task-specific patterns.</a:t>
+              <a:defRPr sz="1800"/>
+            </a:pPr>
+            <a:r>
+              <a:t>A shared encoder transfers supervision across related endpoints.</a:t>
+            </a:r>
+          </a:p>
+          <a:p>
+            <a:pPr>
+              <a:defRPr sz="1800"/>
+            </a:pPr>
+            <a:r>
+              <a:t>Hard sharing regularizes low-sample tasks and can improve robustness.</a:t>
+            </a:r>
+          </a:p>
+          <a:p>
+            <a:pPr>
+              <a:defRPr sz="1800"/>
+            </a:pPr>
+            <a:r>
+              <a:t>Task-specific heads preserve endpoint-specific decision boundaries.</a:t>
+            </a:r>
+          </a:p>
+          <a:p>
+            <a:pPr>
+              <a:defRPr sz="1800"/>
+            </a:pPr>
+            <a:r>
+              <a:t>This architecture balances generalization and specialization.</a:t>
             </a:r>
           </a:p>
         </p:txBody>
@@ -4274,8 +6371,11 @@
           <a:bodyPr/>
           <a:lstStyle/>
           <a:p>
-            <a:r>
-              <a:t>Slide 5 - Why Neural ODE</a:t>
+            <a:pPr>
+              <a:defRPr sz="3000"/>
+            </a:pPr>
+            <a:r>
+              <a:t>Why Neural ODE</a:t>
             </a:r>
           </a:p>
         </p:txBody>
@@ -4296,26 +6396,34 @@
           <a:lstStyle/>
           <a:p>
             <a:pPr>
-              <a:defRPr sz="2000"/>
-            </a:pPr>
-            <a:r>
-              <a:t>Continuous-time dynamics match PK concentration processes.</a:t>
-            </a:r>
-          </a:p>
-          <a:p>
-            <a:pPr>
-              <a:defRPr sz="2000"/>
-            </a:pPr>
-            <a:r>
-              <a:t>Predictions available on arbitrary time grids.</a:t>
-            </a:r>
-          </a:p>
-          <a:p>
-            <a:pPr>
-              <a:defRPr sz="2000"/>
-            </a:pPr>
-            <a:r>
-              <a:t>Supports mechanistic prior via first-order elimination form.</a:t>
+              <a:defRPr sz="1800"/>
+            </a:pPr>
+            <a:r>
+              <a:t>PK concentration behavior is naturally continuous-time.</a:t>
+            </a:r>
+          </a:p>
+          <a:p>
+            <a:pPr>
+              <a:defRPr sz="1800"/>
+            </a:pPr>
+            <a:r>
+              <a:t>Neural ODE permits trajectory queries at any time grid.</a:t>
+            </a:r>
+          </a:p>
+          <a:p>
+            <a:pPr>
+              <a:defRPr sz="1800"/>
+            </a:pPr>
+            <a:r>
+              <a:t>Dynamics can embed mechanistic priors such as first-order elimination.</a:t>
+            </a:r>
+          </a:p>
+          <a:p>
+            <a:pPr>
+              <a:defRPr sz="1800"/>
+            </a:pPr>
+            <a:r>
+              <a:t>This improves plausibility versus purely discrete latent updates.</a:t>
             </a:r>
           </a:p>
         </p:txBody>
@@ -4353,8 +6461,11 @@
           <a:bodyPr/>
           <a:lstStyle/>
           <a:p>
-            <a:r>
-              <a:t>Slide 6 - Data Pipeline Overview</a:t>
+            <a:pPr>
+              <a:defRPr sz="3000"/>
+            </a:pPr>
+            <a:r>
+              <a:t>Data Pipeline Overview</a:t>
             </a:r>
           </a:p>
         </p:txBody>
@@ -4375,26 +6486,34 @@
           <a:lstStyle/>
           <a:p>
             <a:pPr>
-              <a:defRPr sz="2000"/>
-            </a:pPr>
-            <a:r>
-              <a:t>Phase 3A artifacts and bridge outputs are loaded.</a:t>
-            </a:r>
-          </a:p>
-          <a:p>
-            <a:pPr>
-              <a:defRPr sz="2000"/>
-            </a:pPr>
-            <a:r>
-              <a:t>Task arrays converted into train/val/test DataLoaders.</a:t>
-            </a:r>
-          </a:p>
-          <a:p>
-            <a:pPr>
-              <a:defRPr sz="2000"/>
-            </a:pPr>
-            <a:r>
-              <a:t>Task-aware scaling preserves regression/classification semantics.</a:t>
+              <a:defRPr sz="1800"/>
+            </a:pPr>
+            <a:r>
+              <a:t>Phase 3A processed artifacts and bridge outputs are loaded reproducibly.</a:t>
+            </a:r>
+          </a:p>
+          <a:p>
+            <a:pPr>
+              <a:defRPr sz="1800"/>
+            </a:pPr>
+            <a:r>
+              <a:t>Task arrays are split into train, validation, and test partitions.</a:t>
+            </a:r>
+          </a:p>
+          <a:p>
+            <a:pPr>
+              <a:defRPr sz="1800"/>
+            </a:pPr>
+            <a:r>
+              <a:t>DataLoaders are rebuilt per task with consistent batch semantics.</a:t>
+            </a:r>
+          </a:p>
+          <a:p>
+            <a:pPr>
+              <a:defRPr sz="1800"/>
+            </a:pPr>
+            <a:r>
+              <a:t>Scaling preserves differences between regression and classification targets.</a:t>
             </a:r>
           </a:p>
         </p:txBody>
@@ -4432,8 +6551,11 @@
           <a:bodyPr/>
           <a:lstStyle/>
           <a:p>
-            <a:r>
-              <a:t>Slide 7 - Feature Space Details</a:t>
+            <a:pPr>
+              <a:defRPr sz="3000"/>
+            </a:pPr>
+            <a:r>
+              <a:t>Feature Space Details</a:t>
             </a:r>
           </a:p>
         </p:txBody>
@@ -4454,26 +6576,34 @@
           <a:lstStyle/>
           <a:p>
             <a:pPr>
-              <a:defRPr sz="2000"/>
-            </a:pPr>
-            <a:r>
-              <a:t>Input = descriptors + fingerprints + docking_quality.</a:t>
-            </a:r>
-          </a:p>
-          <a:p>
-            <a:pPr>
-              <a:defRPr sz="2000"/>
-            </a:pPr>
-            <a:r>
-              <a:t>Unified input dimension maintained across all tasks.</a:t>
-            </a:r>
-          </a:p>
-          <a:p>
-            <a:pPr>
-              <a:defRPr sz="2000"/>
-            </a:pPr>
-            <a:r>
-              <a:t>Bridge feature injects structure-level information into learning.</a:t>
+              <a:defRPr sz="1800"/>
+            </a:pPr>
+            <a:r>
+              <a:t>Input vector combines descriptors, fingerprints, and docking_quality.</a:t>
+            </a:r>
+          </a:p>
+          <a:p>
+            <a:pPr>
+              <a:defRPr sz="1800"/>
+            </a:pPr>
+            <a:r>
+              <a:t>One unified input dimension is maintained for all four tasks.</a:t>
+            </a:r>
+          </a:p>
+          <a:p>
+            <a:pPr>
+              <a:defRPr sz="1800"/>
+            </a:pPr>
+            <a:r>
+              <a:t>Structure-derived docking signal is injected into downstream learning.</a:t>
+            </a:r>
+          </a:p>
+          <a:p>
+            <a:pPr>
+              <a:defRPr sz="1800"/>
+            </a:pPr>
+            <a:r>
+              <a:t>Consistent schema enables strict encoder sharing across tasks.</a:t>
             </a:r>
           </a:p>
         </p:txBody>
@@ -4511,8 +6641,11 @@
           <a:bodyPr/>
           <a:lstStyle/>
           <a:p>
-            <a:r>
-              <a:t>Slide 8 - Structure to Binding to PK Bridge</a:t>
+            <a:pPr>
+              <a:defRPr sz="3000"/>
+            </a:pPr>
+            <a:r>
+              <a:t>Structure-to-Binding-to-PK Bridge</a:t>
             </a:r>
           </a:p>
         </p:txBody>
@@ -4533,26 +6666,34 @@
           <a:lstStyle/>
           <a:p>
             <a:pPr>
-              <a:defRPr sz="2000"/>
-            </a:pPr>
-            <a:r>
-              <a:t>RapidDock geometry quality aggregated at target level.</a:t>
-            </a:r>
-          </a:p>
-          <a:p>
-            <a:pPr>
-              <a:defRPr sz="2000"/>
-            </a:pPr>
-            <a:r>
-              <a:t>Binding task receives target-informed docking_quality values.</a:t>
-            </a:r>
-          </a:p>
-          <a:p>
-            <a:pPr>
-              <a:defRPr sz="2000"/>
-            </a:pPr>
-            <a:r>
-              <a:t>Other ADMET tasks are zero-padded for schema consistency.</a:t>
+              <a:defRPr sz="1800"/>
+            </a:pPr>
+            <a:r>
+              <a:t>RapidDock geometry quality is aggregated at protein-target level.</a:t>
+            </a:r>
+          </a:p>
+          <a:p>
+            <a:pPr>
+              <a:defRPr sz="1800"/>
+            </a:pPr>
+            <a:r>
+              <a:t>Binding samples receive target-informed docking_quality augmentation.</a:t>
+            </a:r>
+          </a:p>
+          <a:p>
+            <a:pPr>
+              <a:defRPr sz="1800"/>
+            </a:pPr>
+            <a:r>
+              <a:t>Other ADMET tasks are zero-padded to preserve shared schema.</a:t>
+            </a:r>
+          </a:p>
+          <a:p>
+            <a:pPr>
+              <a:defRPr sz="1800"/>
+            </a:pPr>
+            <a:r>
+              <a:t>Bridge design injects structural signal without task-format drift.</a:t>
             </a:r>
           </a:p>
         </p:txBody>
@@ -4590,8 +6731,11 @@
           <a:bodyPr/>
           <a:lstStyle/>
           <a:p>
-            <a:r>
-              <a:t>Slide 9 - Shared Encoder Architecture</a:t>
+            <a:pPr>
+              <a:defRPr sz="3000"/>
+            </a:pPr>
+            <a:r>
+              <a:t>Shared Encoder Architecture</a:t>
             </a:r>
           </a:p>
         </p:txBody>
@@ -4612,34 +6756,34 @@
           <a:lstStyle/>
           <a:p>
             <a:pPr>
-              <a:defRPr sz="2000"/>
-            </a:pPr>
-            <a:r>
-              <a:t>Linear(input_dim, hidden_dim) + LayerNorm + ReLU + Dropout.</a:t>
-            </a:r>
-          </a:p>
-          <a:p>
-            <a:pPr>
-              <a:defRPr sz="2000"/>
-            </a:pPr>
-            <a:r>
-              <a:t>Second hidden block mirrors first for deeper representation.</a:t>
-            </a:r>
-          </a:p>
-          <a:p>
-            <a:pPr>
-              <a:defRPr sz="2000"/>
-            </a:pPr>
-            <a:r>
-              <a:t>Final projection maps into latent_dim with ReLU.</a:t>
-            </a:r>
-          </a:p>
-          <a:p>
-            <a:pPr>
-              <a:defRPr sz="2000"/>
-            </a:pPr>
-            <a:r>
-              <a:t>LayerNorm stabilizes interleaved multi-task updates.</a:t>
+              <a:defRPr sz="1800"/>
+            </a:pPr>
+            <a:r>
+              <a:t>Block 1: Linear(input_dim, hidden_dim) + LayerNorm + ReLU + Dropout.</a:t>
+            </a:r>
+          </a:p>
+          <a:p>
+            <a:pPr>
+              <a:defRPr sz="1800"/>
+            </a:pPr>
+            <a:r>
+              <a:t>Block 2 repeats hidden transformation for richer nonlinear features.</a:t>
+            </a:r>
+          </a:p>
+          <a:p>
+            <a:pPr>
+              <a:defRPr sz="1800"/>
+            </a:pPr>
+            <a:r>
+              <a:t>Projection layer maps hidden representation to latent_dim.</a:t>
+            </a:r>
+          </a:p>
+          <a:p>
+            <a:pPr>
+              <a:defRPr sz="1800"/>
+            </a:pPr>
+            <a:r>
+              <a:t>LayerNorm is preferred over BatchNorm for interleaved task batches.</a:t>
             </a:r>
           </a:p>
         </p:txBody>
